--- a/2-大一下/01 数据结构/PPT（张学）/第五章 数组和广义表.pptx
+++ b/2-大一下/01 数据结构/PPT（张学）/第五章 数组和广义表.pptx
@@ -5,10 +5,10 @@
     <p:sldMasterId id="2147483650" r:id="rId1"/>
   </p:sldMasterIdLst>
   <p:notesMasterIdLst>
-    <p:notesMasterId r:id="rId30"/>
+    <p:notesMasterId r:id="rId26"/>
   </p:notesMasterIdLst>
   <p:handoutMasterIdLst>
-    <p:handoutMasterId r:id="rId31"/>
+    <p:handoutMasterId r:id="rId27"/>
   </p:handoutMasterIdLst>
   <p:sldIdLst>
     <p:sldId id="263" r:id="rId2"/>
@@ -23,22 +23,18 @@
     <p:sldId id="302" r:id="rId11"/>
     <p:sldId id="271" r:id="rId12"/>
     <p:sldId id="272" r:id="rId13"/>
-    <p:sldId id="273" r:id="rId14"/>
-    <p:sldId id="274" r:id="rId15"/>
-    <p:sldId id="275" r:id="rId16"/>
-    <p:sldId id="276" r:id="rId17"/>
-    <p:sldId id="277" r:id="rId18"/>
-    <p:sldId id="278" r:id="rId19"/>
-    <p:sldId id="279" r:id="rId20"/>
-    <p:sldId id="280" r:id="rId21"/>
-    <p:sldId id="281" r:id="rId22"/>
-    <p:sldId id="282" r:id="rId23"/>
-    <p:sldId id="283" r:id="rId24"/>
-    <p:sldId id="284" r:id="rId25"/>
-    <p:sldId id="285" r:id="rId26"/>
-    <p:sldId id="287" r:id="rId27"/>
-    <p:sldId id="288" r:id="rId28"/>
-    <p:sldId id="300" r:id="rId29"/>
+    <p:sldId id="274" r:id="rId14"/>
+    <p:sldId id="275" r:id="rId15"/>
+    <p:sldId id="276" r:id="rId16"/>
+    <p:sldId id="277" r:id="rId17"/>
+    <p:sldId id="278" r:id="rId18"/>
+    <p:sldId id="279" r:id="rId19"/>
+    <p:sldId id="280" r:id="rId20"/>
+    <p:sldId id="284" r:id="rId21"/>
+    <p:sldId id="285" r:id="rId22"/>
+    <p:sldId id="287" r:id="rId23"/>
+    <p:sldId id="305" r:id="rId24"/>
+    <p:sldId id="300" r:id="rId25"/>
   </p:sldIdLst>
   <p:sldSz cx="12192000" cy="6858000"/>
   <p:notesSz cx="6797675" cy="9928225"/>
@@ -294,7 +290,7 @@
           <a:p>
             <a:fld id="{0C16664E-1BF0-46AE-AAC0-8104A4986E05}" type="datetimeFigureOut">
               <a:rPr lang="zh-CN" altLang="en-US" smtClean="0"/>
-              <a:t>2024/2/25</a:t>
+              <a:t>2026/4/22</a:t>
             </a:fld>
             <a:endParaRPr lang="zh-CN" altLang="en-US"/>
           </a:p>
@@ -12792,23 +12788,7 @@
             </a:pPr>
             <a:r>
               <a:rPr lang="en-US" altLang="zh-CN" b="0" dirty="0"/>
-              <a:t>    </a:t>
-            </a:r>
-            <a:r>
-              <a:rPr lang="en-US" altLang="zh-CN" b="0" dirty="0" err="1"/>
-              <a:t>MatrixElem</a:t>
-            </a:r>
-            <a:r>
-              <a:rPr lang="en-US" altLang="zh-CN" b="0" dirty="0"/>
-              <a:t>  </a:t>
-            </a:r>
-            <a:r>
-              <a:rPr lang="en-US" altLang="zh-CN" b="0" dirty="0" err="1"/>
-              <a:t>elem</a:t>
-            </a:r>
-            <a:r>
-              <a:rPr lang="en-US" altLang="zh-CN" b="0" dirty="0"/>
-              <a:t>; // </a:t>
+              <a:t>    Elem  value; // </a:t>
             </a:r>
             <a:r>
               <a:rPr lang="zh-CN" altLang="en-US" b="0" dirty="0"/>
@@ -12841,7 +12821,7 @@
             </a:pPr>
             <a:r>
               <a:rPr lang="en-US" altLang="zh-CN" b="0" dirty="0"/>
-              <a:t>} Triple;</a:t>
+              <a:t>} Triplet;</a:t>
             </a:r>
           </a:p>
           <a:p>
@@ -12865,15 +12845,7 @@
             </a:pPr>
             <a:r>
               <a:rPr lang="en-US" altLang="zh-CN" b="0" dirty="0"/>
-              <a:t>    Triple </a:t>
-            </a:r>
-            <a:r>
-              <a:rPr lang="en-US" altLang="zh-CN" b="0" dirty="0" err="1"/>
-              <a:t>tripleArray</a:t>
-            </a:r>
-            <a:r>
-              <a:rPr lang="en-US" altLang="zh-CN" b="0" dirty="0"/>
-              <a:t>[MATRIX_SIZE];  // </a:t>
+              <a:t>    Triplet triplets[MATRIX_SIZE];  // </a:t>
             </a:r>
             <a:r>
               <a:rPr lang="zh-CN" altLang="en-US" b="0" dirty="0"/>
@@ -12890,15 +12862,7 @@
             </a:pPr>
             <a:r>
               <a:rPr lang="en-US" altLang="zh-CN" b="0" dirty="0"/>
-              <a:t>    int </a:t>
-            </a:r>
-            <a:r>
-              <a:rPr lang="en-US" altLang="zh-CN" b="0" dirty="0" err="1"/>
-              <a:t>numOfRows</a:t>
-            </a:r>
-            <a:r>
-              <a:rPr lang="en-US" altLang="zh-CN" b="0" dirty="0"/>
-              <a:t>;   // </a:t>
+              <a:t>    int rows;   // </a:t>
             </a:r>
             <a:r>
               <a:rPr lang="zh-CN" altLang="en-US" b="0" dirty="0"/>
@@ -12915,15 +12879,7 @@
             </a:pPr>
             <a:r>
               <a:rPr lang="en-US" altLang="zh-CN" b="0" dirty="0"/>
-              <a:t>    int </a:t>
-            </a:r>
-            <a:r>
-              <a:rPr lang="en-US" altLang="zh-CN" b="0" dirty="0" err="1"/>
-              <a:t>numOfColumns</a:t>
-            </a:r>
-            <a:r>
-              <a:rPr lang="en-US" altLang="zh-CN" b="0" dirty="0"/>
-              <a:t>;    // </a:t>
+              <a:t>    int columns;    // </a:t>
             </a:r>
             <a:r>
               <a:rPr lang="zh-CN" altLang="en-US" b="0" dirty="0"/>
@@ -12940,7 +12896,15 @@
             </a:pPr>
             <a:r>
               <a:rPr lang="en-US" altLang="zh-CN" b="0" dirty="0"/>
-              <a:t>    int length;  // </a:t>
+              <a:t>    int </a:t>
+            </a:r>
+            <a:r>
+              <a:rPr lang="en-US" altLang="zh-CN" b="0" dirty="0" err="1"/>
+              <a:t>nonzeros</a:t>
+            </a:r>
+            <a:r>
+              <a:rPr lang="en-US" altLang="zh-CN" b="0" dirty="0"/>
+              <a:t>;  // </a:t>
             </a:r>
             <a:r>
               <a:rPr lang="zh-CN" altLang="en-US" b="0" dirty="0"/>
@@ -13032,7 +12996,7 @@
           <a:p>
             <a:r>
               <a:rPr lang="zh-CN" altLang="en-US" dirty="0"/>
-              <a:t>对稀疏矩阵的操作</a:t>
+              <a:t>列序递增转置</a:t>
             </a:r>
           </a:p>
         </p:txBody>
@@ -13071,15 +13035,7 @@
             </a:pPr>
             <a:r>
               <a:rPr lang="en-US" altLang="zh-CN" b="0" dirty="0"/>
-              <a:t>Status </a:t>
-            </a:r>
-            <a:r>
-              <a:rPr lang="en-US" altLang="zh-CN" b="0" dirty="0" err="1"/>
-              <a:t>InitMatrix</a:t>
-            </a:r>
-            <a:r>
-              <a:rPr lang="en-US" altLang="zh-CN" b="0" dirty="0"/>
-              <a:t>(</a:t>
+              <a:t>Status Transpose (</a:t>
             </a:r>
             <a:r>
               <a:rPr lang="en-US" altLang="zh-CN" b="0" dirty="0" err="1"/>
@@ -13091,11 +13047,11 @@
             </a:r>
             <a:r>
               <a:rPr lang="en-US" altLang="zh-CN" b="0" dirty="0" err="1"/>
-              <a:t>pMatrix</a:t>
+              <a:t>pSourceMatrix</a:t>
             </a:r>
             <a:r>
               <a:rPr lang="en-US" altLang="zh-CN" b="0" dirty="0"/>
-              <a:t>); </a:t>
+              <a:t>,</a:t>
             </a:r>
           </a:p>
           <a:p>
@@ -13107,15 +13063,7 @@
             </a:pPr>
             <a:r>
               <a:rPr lang="en-US" altLang="zh-CN" b="0" dirty="0"/>
-              <a:t>Status </a:t>
-            </a:r>
-            <a:r>
-              <a:rPr lang="en-US" altLang="zh-CN" b="0" dirty="0" err="1"/>
-              <a:t>PrintMatrix</a:t>
-            </a:r>
-            <a:r>
-              <a:rPr lang="en-US" altLang="zh-CN" b="0" dirty="0"/>
-              <a:t>(</a:t>
+              <a:t>                              </a:t>
             </a:r>
             <a:r>
               <a:rPr lang="en-US" altLang="zh-CN" b="0" dirty="0" err="1"/>
@@ -13127,11 +13075,11 @@
             </a:r>
             <a:r>
               <a:rPr lang="en-US" altLang="zh-CN" b="0" dirty="0" err="1"/>
-              <a:t>pMatrix</a:t>
+              <a:t>pDestMatrix</a:t>
             </a:r>
             <a:r>
               <a:rPr lang="en-US" altLang="zh-CN" b="0" dirty="0"/>
-              <a:t>);</a:t>
+              <a:t>) {</a:t>
             </a:r>
           </a:p>
           <a:p>
@@ -13143,31 +13091,15 @@
             </a:pPr>
             <a:r>
               <a:rPr lang="en-US" altLang="zh-CN" b="0" dirty="0"/>
-              <a:t>Status </a:t>
+              <a:t>    int </a:t>
             </a:r>
             <a:r>
               <a:rPr lang="en-US" altLang="zh-CN" b="0" dirty="0" err="1"/>
-              <a:t>CopyMatrix</a:t>
+              <a:t>i</a:t>
             </a:r>
             <a:r>
               <a:rPr lang="en-US" altLang="zh-CN" b="0" dirty="0"/>
-              <a:t>(</a:t>
-            </a:r>
-            <a:r>
-              <a:rPr lang="en-US" altLang="zh-CN" b="0" dirty="0" err="1"/>
-              <a:t>SparseMatrix</a:t>
-            </a:r>
-            <a:r>
-              <a:rPr lang="en-US" altLang="zh-CN" b="0" dirty="0"/>
-              <a:t>* </a:t>
-            </a:r>
-            <a:r>
-              <a:rPr lang="en-US" altLang="zh-CN" b="0" dirty="0" err="1"/>
-              <a:t>pSourceMatrix</a:t>
-            </a:r>
-            <a:r>
-              <a:rPr lang="en-US" altLang="zh-CN" b="0" dirty="0"/>
-              <a:t>,</a:t>
+              <a:t>, j, col;</a:t>
             </a:r>
           </a:p>
           <a:p>
@@ -13179,23 +13111,23 @@
             </a:pPr>
             <a:r>
               <a:rPr lang="en-US" altLang="zh-CN" b="0" dirty="0"/>
-              <a:t>                               </a:t>
+              <a:t>    if (</a:t>
             </a:r>
             <a:r>
               <a:rPr lang="en-US" altLang="zh-CN" b="0" dirty="0" err="1"/>
-              <a:t>SparseMatrix</a:t>
+              <a:t>pSourceMatrix</a:t>
             </a:r>
             <a:r>
               <a:rPr lang="en-US" altLang="zh-CN" b="0" dirty="0"/>
-              <a:t>* </a:t>
+              <a:t>-&gt;</a:t>
             </a:r>
             <a:r>
               <a:rPr lang="en-US" altLang="zh-CN" b="0" dirty="0" err="1"/>
-              <a:t>pDestMatrix</a:t>
+              <a:t>nonzeros</a:t>
             </a:r>
             <a:r>
               <a:rPr lang="en-US" altLang="zh-CN" b="0" dirty="0"/>
-              <a:t>);</a:t>
+              <a:t>&lt;=0) return OK;</a:t>
             </a:r>
           </a:p>
           <a:p>
@@ -13207,32 +13139,13 @@
             </a:pPr>
             <a:r>
               <a:rPr lang="en-US" altLang="zh-CN" b="0" dirty="0"/>
-              <a:t>Status </a:t>
-            </a:r>
-            <a:r>
-              <a:rPr lang="en-US" altLang="zh-CN" b="0" dirty="0" err="1"/>
-              <a:t>AddMatrix</a:t>
-            </a:r>
-            <a:r>
-              <a:rPr lang="en-US" altLang="zh-CN" b="0" dirty="0"/>
-              <a:t>(</a:t>
-            </a:r>
-            <a:r>
-              <a:rPr lang="en-US" altLang="zh-CN" b="0" dirty="0" err="1"/>
-              <a:t>SparseMatrix</a:t>
-            </a:r>
-            <a:r>
-              <a:rPr lang="en-US" altLang="zh-CN" b="0" dirty="0"/>
-              <a:t>* pM1, </a:t>
-            </a:r>
-            <a:r>
-              <a:rPr lang="en-US" altLang="zh-CN" b="0" dirty="0" err="1"/>
-              <a:t>SparseMatrix</a:t>
-            </a:r>
-            <a:r>
-              <a:rPr lang="en-US" altLang="zh-CN" b="0" dirty="0"/>
-              <a:t>* pM2,</a:t>
-            </a:r>
+              <a:t>    j=0;  // </a:t>
+            </a:r>
+            <a:r>
+              <a:rPr lang="zh-CN" altLang="en-US" b="0" dirty="0"/>
+              <a:t>要写入目的三元组数组的位置</a:t>
+            </a:r>
+            <a:endParaRPr lang="en-US" altLang="zh-CN" b="0" dirty="0"/>
           </a:p>
           <a:p>
             <a:pPr marL="0" indent="0">
@@ -13243,23 +13156,15 @@
             </a:pPr>
             <a:r>
               <a:rPr lang="en-US" altLang="zh-CN" b="0" dirty="0"/>
-              <a:t>                             </a:t>
+              <a:t>    for(col=0; col&lt;</a:t>
             </a:r>
             <a:r>
               <a:rPr lang="en-US" altLang="zh-CN" b="0" dirty="0" err="1"/>
-              <a:t>SparseMatrix</a:t>
+              <a:t>pSourceMatrix</a:t>
             </a:r>
             <a:r>
               <a:rPr lang="en-US" altLang="zh-CN" b="0" dirty="0"/>
-              <a:t>* </a:t>
-            </a:r>
-            <a:r>
-              <a:rPr lang="en-US" altLang="zh-CN" b="0" dirty="0" err="1"/>
-              <a:t>pResultMatrix</a:t>
-            </a:r>
-            <a:r>
-              <a:rPr lang="en-US" altLang="zh-CN" b="0" dirty="0"/>
-              <a:t>);</a:t>
+              <a:t>-&gt;columns; col++){</a:t>
             </a:r>
           </a:p>
           <a:p>
@@ -13271,15 +13176,23 @@
             </a:pPr>
             <a:r>
               <a:rPr lang="en-US" altLang="zh-CN" b="0" dirty="0"/>
-              <a:t>Status </a:t>
-            </a:r>
-            <a:r>
-              <a:rPr lang="en-US" altLang="zh-CN" b="0" dirty="0" err="1"/>
-              <a:t>SubMatrix</a:t>
+              <a:t>        /* </a:t>
+            </a:r>
+            <a:r>
+              <a:rPr lang="zh-CN" altLang="en-US" b="0" dirty="0"/>
+              <a:t>从第</a:t>
             </a:r>
             <a:r>
               <a:rPr lang="en-US" altLang="zh-CN" b="0" dirty="0"/>
-              <a:t>(……);</a:t>
+              <a:t>0</a:t>
+            </a:r>
+            <a:r>
+              <a:rPr lang="zh-CN" altLang="en-US" b="0" dirty="0"/>
+              <a:t>列开始，一列一列地转置 *</a:t>
+            </a:r>
+            <a:r>
+              <a:rPr lang="en-US" altLang="zh-CN" b="0" dirty="0"/>
+              <a:t>/</a:t>
             </a:r>
           </a:p>
           <a:p>
@@ -13291,15 +13204,47 @@
             </a:pPr>
             <a:r>
               <a:rPr lang="en-US" altLang="zh-CN" b="0" dirty="0"/>
-              <a:t>Status </a:t>
+              <a:t>        for(</a:t>
             </a:r>
             <a:r>
               <a:rPr lang="en-US" altLang="zh-CN" b="0" dirty="0" err="1"/>
-              <a:t>MultMatrix</a:t>
+              <a:t>i</a:t>
             </a:r>
             <a:r>
               <a:rPr lang="en-US" altLang="zh-CN" b="0" dirty="0"/>
-              <a:t>(……);</a:t>
+              <a:t>=0; </a:t>
+            </a:r>
+            <a:r>
+              <a:rPr lang="en-US" altLang="zh-CN" b="0" dirty="0" err="1"/>
+              <a:t>i</a:t>
+            </a:r>
+            <a:r>
+              <a:rPr lang="en-US" altLang="zh-CN" b="0" dirty="0"/>
+              <a:t>&lt;</a:t>
+            </a:r>
+            <a:r>
+              <a:rPr lang="en-US" altLang="zh-CN" b="0" dirty="0" err="1"/>
+              <a:t>pSourceMatrix</a:t>
+            </a:r>
+            <a:r>
+              <a:rPr lang="en-US" altLang="zh-CN" b="0" dirty="0"/>
+              <a:t>-&gt;</a:t>
+            </a:r>
+            <a:r>
+              <a:rPr lang="en-US" altLang="zh-CN" b="0" dirty="0" err="1"/>
+              <a:t>nonzeros</a:t>
+            </a:r>
+            <a:r>
+              <a:rPr lang="en-US" altLang="zh-CN" b="0" dirty="0"/>
+              <a:t>; </a:t>
+            </a:r>
+            <a:r>
+              <a:rPr lang="en-US" altLang="zh-CN" b="0" dirty="0" err="1"/>
+              <a:t>i</a:t>
+            </a:r>
+            <a:r>
+              <a:rPr lang="en-US" altLang="zh-CN" b="0" dirty="0"/>
+              <a:t>++) {</a:t>
             </a:r>
           </a:p>
           <a:p>
@@ -13311,31 +13256,23 @@
             </a:pPr>
             <a:r>
               <a:rPr lang="en-US" altLang="zh-CN" b="0" dirty="0"/>
-              <a:t>Status </a:t>
-            </a:r>
-            <a:r>
-              <a:rPr lang="en-US" altLang="zh-CN" b="0" dirty="0" err="1"/>
-              <a:t>TransposeMatrix</a:t>
+              <a:t>            // </a:t>
+            </a:r>
+            <a:r>
+              <a:rPr lang="zh-CN" altLang="en-US" b="0" dirty="0"/>
+              <a:t>寻找列号为</a:t>
             </a:r>
             <a:r>
               <a:rPr lang="en-US" altLang="zh-CN" b="0" dirty="0"/>
-              <a:t>(</a:t>
-            </a:r>
-            <a:r>
-              <a:rPr lang="en-US" altLang="zh-CN" b="0" dirty="0" err="1"/>
-              <a:t>SparseMatrix</a:t>
+              <a:t>col</a:t>
+            </a:r>
+            <a:r>
+              <a:rPr lang="zh-CN" altLang="en-US" b="0" dirty="0"/>
+              <a:t>的三元组</a:t>
             </a:r>
             <a:r>
               <a:rPr lang="en-US" altLang="zh-CN" b="0" dirty="0"/>
-              <a:t>* </a:t>
-            </a:r>
-            <a:r>
-              <a:rPr lang="en-US" altLang="zh-CN" b="0" dirty="0" err="1"/>
-              <a:t>pSourceMatrix</a:t>
-            </a:r>
-            <a:r>
-              <a:rPr lang="en-US" altLang="zh-CN" b="0" dirty="0"/>
-              <a:t>,</a:t>
+              <a:t>                           </a:t>
             </a:r>
           </a:p>
           <a:p>
@@ -13347,23 +13284,7 @@
             </a:pPr>
             <a:r>
               <a:rPr lang="en-US" altLang="zh-CN" b="0" dirty="0"/>
-              <a:t>                                       </a:t>
-            </a:r>
-            <a:r>
-              <a:rPr lang="en-US" altLang="zh-CN" b="0" dirty="0" err="1"/>
-              <a:t>SparseMatrix</a:t>
-            </a:r>
-            <a:r>
-              <a:rPr lang="en-US" altLang="zh-CN" b="0" dirty="0"/>
-              <a:t>* </a:t>
-            </a:r>
-            <a:r>
-              <a:rPr lang="en-US" altLang="zh-CN" b="0" dirty="0" err="1"/>
-              <a:t>pDestMatrix</a:t>
-            </a:r>
-            <a:r>
-              <a:rPr lang="en-US" altLang="zh-CN" b="0" dirty="0"/>
-              <a:t>);</a:t>
+              <a:t>        </a:t>
             </a:r>
           </a:p>
           <a:p>
@@ -13373,6 +13294,10 @@
               </a:lnSpc>
               <a:buNone/>
             </a:pPr>
+            <a:r>
+              <a:rPr lang="en-US" altLang="zh-CN" b="0" dirty="0"/>
+              <a:t>    </a:t>
+            </a:r>
             <a:endParaRPr lang="zh-CN" altLang="en-US" b="0" dirty="0"/>
           </a:p>
         </p:txBody>
@@ -13380,7 +13305,7 @@
     </p:spTree>
     <p:extLst>
       <p:ext uri="{BB962C8B-B14F-4D97-AF65-F5344CB8AC3E}">
-        <p14:creationId xmlns:p14="http://schemas.microsoft.com/office/powerpoint/2010/main" val="915615820"/>
+        <p14:creationId xmlns:p14="http://schemas.microsoft.com/office/powerpoint/2010/main" val="757460386"/>
       </p:ext>
     </p:extLst>
   </p:cSld>
@@ -13432,389 +13357,6 @@
               <a:rPr lang="zh-CN" altLang="en-US" dirty="0"/>
               <a:t>列序递增转置</a:t>
             </a:r>
-          </a:p>
-        </p:txBody>
-      </p:sp>
-      <p:sp>
-        <p:nvSpPr>
-          <p:cNvPr id="3" name="内容占位符 2">
-            <a:extLst>
-              <a:ext uri="{FF2B5EF4-FFF2-40B4-BE49-F238E27FC236}">
-                <a16:creationId xmlns:a16="http://schemas.microsoft.com/office/drawing/2014/main" id="{1AE53939-FD31-4F65-83B0-AE13DE6B69C5}"/>
-              </a:ext>
-            </a:extLst>
-          </p:cNvPr>
-          <p:cNvSpPr>
-            <a:spLocks noGrp="1"/>
-          </p:cNvSpPr>
-          <p:nvPr>
-            <p:ph idx="1"/>
-          </p:nvPr>
-        </p:nvSpPr>
-        <p:spPr>
-          <a:xfrm>
-            <a:off x="304800" y="1219200"/>
-            <a:ext cx="11734800" cy="5181600"/>
-          </a:xfrm>
-        </p:spPr>
-        <p:txBody>
-          <a:bodyPr/>
-          <a:lstStyle/>
-          <a:p>
-            <a:pPr marL="0" indent="0">
-              <a:lnSpc>
-                <a:spcPct val="100000"/>
-              </a:lnSpc>
-              <a:buNone/>
-            </a:pPr>
-            <a:r>
-              <a:rPr lang="en-US" altLang="zh-CN" b="0" dirty="0"/>
-              <a:t>Status </a:t>
-            </a:r>
-            <a:r>
-              <a:rPr lang="en-US" altLang="zh-CN" b="0" dirty="0" err="1"/>
-              <a:t>TransposeMatrix</a:t>
-            </a:r>
-            <a:r>
-              <a:rPr lang="en-US" altLang="zh-CN" b="0" dirty="0"/>
-              <a:t>(</a:t>
-            </a:r>
-            <a:r>
-              <a:rPr lang="en-US" altLang="zh-CN" b="0" dirty="0" err="1"/>
-              <a:t>SparseMatrix</a:t>
-            </a:r>
-            <a:r>
-              <a:rPr lang="en-US" altLang="zh-CN" b="0" dirty="0"/>
-              <a:t>* </a:t>
-            </a:r>
-            <a:r>
-              <a:rPr lang="en-US" altLang="zh-CN" b="0" dirty="0" err="1"/>
-              <a:t>pSourceMatrix</a:t>
-            </a:r>
-            <a:r>
-              <a:rPr lang="en-US" altLang="zh-CN" b="0" dirty="0"/>
-              <a:t>,</a:t>
-            </a:r>
-          </a:p>
-          <a:p>
-            <a:pPr marL="0" indent="0">
-              <a:lnSpc>
-                <a:spcPct val="100000"/>
-              </a:lnSpc>
-              <a:buNone/>
-            </a:pPr>
-            <a:r>
-              <a:rPr lang="en-US" altLang="zh-CN" b="0" dirty="0"/>
-              <a:t>                                       </a:t>
-            </a:r>
-            <a:r>
-              <a:rPr lang="en-US" altLang="zh-CN" b="0" dirty="0" err="1"/>
-              <a:t>SparseMatrix</a:t>
-            </a:r>
-            <a:r>
-              <a:rPr lang="en-US" altLang="zh-CN" b="0" dirty="0"/>
-              <a:t>* </a:t>
-            </a:r>
-            <a:r>
-              <a:rPr lang="en-US" altLang="zh-CN" b="0" dirty="0" err="1"/>
-              <a:t>pDestMatrix</a:t>
-            </a:r>
-            <a:r>
-              <a:rPr lang="en-US" altLang="zh-CN" b="0" dirty="0"/>
-              <a:t>) {</a:t>
-            </a:r>
-          </a:p>
-          <a:p>
-            <a:pPr marL="0" indent="0">
-              <a:lnSpc>
-                <a:spcPct val="100000"/>
-              </a:lnSpc>
-              <a:buNone/>
-            </a:pPr>
-            <a:r>
-              <a:rPr lang="en-US" altLang="zh-CN" b="0" dirty="0"/>
-              <a:t>    int </a:t>
-            </a:r>
-            <a:r>
-              <a:rPr lang="en-US" altLang="zh-CN" b="0" dirty="0" err="1"/>
-              <a:t>i</a:t>
-            </a:r>
-            <a:r>
-              <a:rPr lang="en-US" altLang="zh-CN" b="0" dirty="0"/>
-              <a:t>, j, col;</a:t>
-            </a:r>
-          </a:p>
-          <a:p>
-            <a:pPr marL="0" indent="0">
-              <a:lnSpc>
-                <a:spcPct val="100000"/>
-              </a:lnSpc>
-              <a:buNone/>
-            </a:pPr>
-            <a:r>
-              <a:rPr lang="en-US" altLang="zh-CN" b="0" dirty="0"/>
-              <a:t>    if (</a:t>
-            </a:r>
-            <a:r>
-              <a:rPr lang="en-US" altLang="zh-CN" b="0" dirty="0" err="1"/>
-              <a:t>pSourceMatrix</a:t>
-            </a:r>
-            <a:r>
-              <a:rPr lang="en-US" altLang="zh-CN" b="0" dirty="0"/>
-              <a:t>-&gt;length&lt;=0) {</a:t>
-            </a:r>
-          </a:p>
-          <a:p>
-            <a:pPr marL="0" indent="0">
-              <a:lnSpc>
-                <a:spcPct val="100000"/>
-              </a:lnSpc>
-              <a:buNone/>
-            </a:pPr>
-            <a:r>
-              <a:rPr lang="en-US" altLang="zh-CN" b="0" dirty="0"/>
-              <a:t>        return ERROR;</a:t>
-            </a:r>
-          </a:p>
-          <a:p>
-            <a:pPr marL="0" indent="0">
-              <a:lnSpc>
-                <a:spcPct val="100000"/>
-              </a:lnSpc>
-              <a:buNone/>
-            </a:pPr>
-            <a:r>
-              <a:rPr lang="en-US" altLang="zh-CN" b="0" dirty="0"/>
-              <a:t>    }</a:t>
-            </a:r>
-          </a:p>
-          <a:p>
-            <a:pPr marL="0" indent="0">
-              <a:lnSpc>
-                <a:spcPct val="100000"/>
-              </a:lnSpc>
-              <a:buNone/>
-            </a:pPr>
-            <a:r>
-              <a:rPr lang="en-US" altLang="zh-CN" b="0" dirty="0"/>
-              <a:t>    j=0;  // </a:t>
-            </a:r>
-            <a:r>
-              <a:rPr lang="zh-CN" altLang="en-US" b="0" dirty="0"/>
-              <a:t>要写入目的三元组数组的位置</a:t>
-            </a:r>
-            <a:endParaRPr lang="en-US" altLang="zh-CN" b="0" dirty="0"/>
-          </a:p>
-          <a:p>
-            <a:pPr marL="0" indent="0">
-              <a:lnSpc>
-                <a:spcPct val="100000"/>
-              </a:lnSpc>
-              <a:buNone/>
-            </a:pPr>
-            <a:r>
-              <a:rPr lang="en-US" altLang="zh-CN" b="0" dirty="0"/>
-              <a:t>    for(col=0; col&lt;</a:t>
-            </a:r>
-            <a:r>
-              <a:rPr lang="en-US" altLang="zh-CN" b="0" dirty="0" err="1"/>
-              <a:t>pSourceMatrix</a:t>
-            </a:r>
-            <a:r>
-              <a:rPr lang="en-US" altLang="zh-CN" b="0" dirty="0"/>
-              <a:t>-&gt;</a:t>
-            </a:r>
-            <a:r>
-              <a:rPr lang="en-US" altLang="zh-CN" b="0" dirty="0" err="1"/>
-              <a:t>numOfColumns</a:t>
-            </a:r>
-            <a:r>
-              <a:rPr lang="en-US" altLang="zh-CN" b="0" dirty="0"/>
-              <a:t>; col++){</a:t>
-            </a:r>
-          </a:p>
-          <a:p>
-            <a:pPr marL="0" indent="0">
-              <a:lnSpc>
-                <a:spcPct val="100000"/>
-              </a:lnSpc>
-              <a:buNone/>
-            </a:pPr>
-            <a:r>
-              <a:rPr lang="en-US" altLang="zh-CN" b="0" dirty="0"/>
-              <a:t>        /* </a:t>
-            </a:r>
-            <a:r>
-              <a:rPr lang="zh-CN" altLang="en-US" b="0" dirty="0"/>
-              <a:t>从第</a:t>
-            </a:r>
-            <a:r>
-              <a:rPr lang="en-US" altLang="zh-CN" b="0" dirty="0"/>
-              <a:t>0</a:t>
-            </a:r>
-            <a:r>
-              <a:rPr lang="zh-CN" altLang="en-US" b="0" dirty="0"/>
-              <a:t>列开始，一列一列地转置 *</a:t>
-            </a:r>
-            <a:r>
-              <a:rPr lang="en-US" altLang="zh-CN" b="0" dirty="0"/>
-              <a:t>/</a:t>
-            </a:r>
-          </a:p>
-          <a:p>
-            <a:pPr marL="0" indent="0">
-              <a:lnSpc>
-                <a:spcPct val="100000"/>
-              </a:lnSpc>
-              <a:buNone/>
-            </a:pPr>
-            <a:r>
-              <a:rPr lang="en-US" altLang="zh-CN" b="0" dirty="0"/>
-              <a:t>        for(</a:t>
-            </a:r>
-            <a:r>
-              <a:rPr lang="en-US" altLang="zh-CN" b="0" dirty="0" err="1"/>
-              <a:t>i</a:t>
-            </a:r>
-            <a:r>
-              <a:rPr lang="en-US" altLang="zh-CN" b="0" dirty="0"/>
-              <a:t>=0; </a:t>
-            </a:r>
-            <a:r>
-              <a:rPr lang="en-US" altLang="zh-CN" b="0" dirty="0" err="1"/>
-              <a:t>i</a:t>
-            </a:r>
-            <a:r>
-              <a:rPr lang="en-US" altLang="zh-CN" b="0" dirty="0"/>
-              <a:t>&lt;</a:t>
-            </a:r>
-            <a:r>
-              <a:rPr lang="en-US" altLang="zh-CN" b="0" dirty="0" err="1"/>
-              <a:t>pSourceMatrix</a:t>
-            </a:r>
-            <a:r>
-              <a:rPr lang="en-US" altLang="zh-CN" b="0" dirty="0"/>
-              <a:t>-&gt;length; </a:t>
-            </a:r>
-            <a:r>
-              <a:rPr lang="en-US" altLang="zh-CN" b="0" dirty="0" err="1"/>
-              <a:t>i</a:t>
-            </a:r>
-            <a:r>
-              <a:rPr lang="en-US" altLang="zh-CN" b="0" dirty="0"/>
-              <a:t>++) {</a:t>
-            </a:r>
-          </a:p>
-          <a:p>
-            <a:pPr marL="0" indent="0">
-              <a:lnSpc>
-                <a:spcPct val="100000"/>
-              </a:lnSpc>
-              <a:buNone/>
-            </a:pPr>
-            <a:r>
-              <a:rPr lang="en-US" altLang="zh-CN" b="0" dirty="0"/>
-              <a:t>            // </a:t>
-            </a:r>
-            <a:r>
-              <a:rPr lang="zh-CN" altLang="en-US" b="0" dirty="0"/>
-              <a:t>寻找列号为</a:t>
-            </a:r>
-            <a:r>
-              <a:rPr lang="en-US" altLang="zh-CN" b="0" dirty="0"/>
-              <a:t>col</a:t>
-            </a:r>
-            <a:r>
-              <a:rPr lang="zh-CN" altLang="en-US" b="0" dirty="0"/>
-              <a:t>的三元组</a:t>
-            </a:r>
-            <a:r>
-              <a:rPr lang="en-US" altLang="zh-CN" b="0" dirty="0"/>
-              <a:t>                           </a:t>
-            </a:r>
-          </a:p>
-          <a:p>
-            <a:pPr marL="0" indent="0">
-              <a:lnSpc>
-                <a:spcPct val="100000"/>
-              </a:lnSpc>
-              <a:buNone/>
-            </a:pPr>
-            <a:r>
-              <a:rPr lang="en-US" altLang="zh-CN" b="0" dirty="0"/>
-              <a:t>        </a:t>
-            </a:r>
-          </a:p>
-          <a:p>
-            <a:pPr marL="0" indent="0">
-              <a:lnSpc>
-                <a:spcPct val="100000"/>
-              </a:lnSpc>
-              <a:buNone/>
-            </a:pPr>
-            <a:r>
-              <a:rPr lang="en-US" altLang="zh-CN" b="0" dirty="0"/>
-              <a:t>    </a:t>
-            </a:r>
-            <a:endParaRPr lang="zh-CN" altLang="en-US" b="0" dirty="0"/>
-          </a:p>
-        </p:txBody>
-      </p:sp>
-    </p:spTree>
-    <p:extLst>
-      <p:ext uri="{BB962C8B-B14F-4D97-AF65-F5344CB8AC3E}">
-        <p14:creationId xmlns:p14="http://schemas.microsoft.com/office/powerpoint/2010/main" val="757460386"/>
-      </p:ext>
-    </p:extLst>
-  </p:cSld>
-  <p:clrMapOvr>
-    <a:masterClrMapping/>
-  </p:clrMapOvr>
-</p:sld>
-</file>
-
-<file path=ppt/slides/slide15.xml><?xml version="1.0" encoding="utf-8"?>
-<p:sld xmlns:a="http://schemas.openxmlformats.org/drawingml/2006/main" xmlns:r="http://schemas.openxmlformats.org/officeDocument/2006/relationships" xmlns:p="http://schemas.openxmlformats.org/presentationml/2006/main">
-  <p:cSld>
-    <p:spTree>
-      <p:nvGrpSpPr>
-        <p:cNvPr id="1" name=""/>
-        <p:cNvGrpSpPr/>
-        <p:nvPr/>
-      </p:nvGrpSpPr>
-      <p:grpSpPr>
-        <a:xfrm>
-          <a:off x="0" y="0"/>
-          <a:ext cx="0" cy="0"/>
-          <a:chOff x="0" y="0"/>
-          <a:chExt cx="0" cy="0"/>
-        </a:xfrm>
-      </p:grpSpPr>
-      <p:sp>
-        <p:nvSpPr>
-          <p:cNvPr id="2" name="标题 1">
-            <a:extLst>
-              <a:ext uri="{FF2B5EF4-FFF2-40B4-BE49-F238E27FC236}">
-                <a16:creationId xmlns:a16="http://schemas.microsoft.com/office/drawing/2014/main" id="{431D1AB9-AC79-44DB-AA4C-0EAED607DED7}"/>
-              </a:ext>
-            </a:extLst>
-          </p:cNvPr>
-          <p:cNvSpPr>
-            <a:spLocks noGrp="1"/>
-          </p:cNvSpPr>
-          <p:nvPr>
-            <p:ph type="title"/>
-          </p:nvPr>
-        </p:nvSpPr>
-        <p:spPr/>
-        <p:txBody>
-          <a:bodyPr/>
-          <a:lstStyle/>
-          <a:p>
-            <a:r>
-              <a:rPr lang="zh-CN" altLang="en-US" dirty="0"/>
-              <a:t>列序递增转置</a:t>
-            </a:r>
             <a:r>
               <a:rPr lang="en-US" altLang="zh-CN" dirty="0"/>
               <a:t>(</a:t>
@@ -13873,15 +13415,7 @@
             </a:r>
             <a:r>
               <a:rPr lang="en-US" altLang="zh-CN" b="0" dirty="0"/>
-              <a:t>-&gt;</a:t>
-            </a:r>
-            <a:r>
-              <a:rPr lang="en-US" altLang="zh-CN" b="0" dirty="0" err="1"/>
-              <a:t>tripleArray</a:t>
-            </a:r>
-            <a:r>
-              <a:rPr lang="en-US" altLang="zh-CN" b="0" dirty="0"/>
-              <a:t>[</a:t>
+              <a:t>-&gt;triplets[</a:t>
             </a:r>
             <a:r>
               <a:rPr lang="en-US" altLang="zh-CN" b="0" dirty="0" err="1"/>
@@ -13909,15 +13443,7 @@
             </a:r>
             <a:r>
               <a:rPr lang="en-US" altLang="zh-CN" b="0" dirty="0"/>
-              <a:t>-&gt;</a:t>
-            </a:r>
-            <a:r>
-              <a:rPr lang="en-US" altLang="zh-CN" b="0" dirty="0" err="1"/>
-              <a:t>tripleArray</a:t>
-            </a:r>
-            <a:r>
-              <a:rPr lang="en-US" altLang="zh-CN" b="0" dirty="0"/>
-              <a:t>[j].row=</a:t>
+              <a:t>-&gt;triplets[j].row=</a:t>
             </a:r>
           </a:p>
           <a:p>
@@ -13937,15 +13463,7 @@
             </a:r>
             <a:r>
               <a:rPr lang="en-US" altLang="zh-CN" b="0" dirty="0"/>
-              <a:t>-&gt;</a:t>
-            </a:r>
-            <a:r>
-              <a:rPr lang="en-US" altLang="zh-CN" b="0" dirty="0" err="1"/>
-              <a:t>tripleArray</a:t>
-            </a:r>
-            <a:r>
-              <a:rPr lang="en-US" altLang="zh-CN" b="0" dirty="0"/>
-              <a:t>[</a:t>
+              <a:t>-&gt;triplets[</a:t>
             </a:r>
             <a:r>
               <a:rPr lang="en-US" altLang="zh-CN" b="0" dirty="0" err="1"/>
@@ -13973,15 +13491,7 @@
             </a:r>
             <a:r>
               <a:rPr lang="en-US" altLang="zh-CN" b="0" dirty="0"/>
-              <a:t>-&gt;</a:t>
-            </a:r>
-            <a:r>
-              <a:rPr lang="en-US" altLang="zh-CN" b="0" dirty="0" err="1"/>
-              <a:t>tripleArray</a:t>
-            </a:r>
-            <a:r>
-              <a:rPr lang="en-US" altLang="zh-CN" b="0" dirty="0"/>
-              <a:t>[j].column=</a:t>
+              <a:t>-&gt;triplets[j].column=</a:t>
             </a:r>
           </a:p>
           <a:p>
@@ -14001,15 +13511,7 @@
             </a:r>
             <a:r>
               <a:rPr lang="en-US" altLang="zh-CN" b="0" dirty="0"/>
-              <a:t>-&gt;</a:t>
-            </a:r>
-            <a:r>
-              <a:rPr lang="en-US" altLang="zh-CN" b="0" dirty="0" err="1"/>
-              <a:t>tripleArray</a:t>
-            </a:r>
-            <a:r>
-              <a:rPr lang="en-US" altLang="zh-CN" b="0" dirty="0"/>
-              <a:t>[</a:t>
+              <a:t>-&gt;triplets[</a:t>
             </a:r>
             <a:r>
               <a:rPr lang="en-US" altLang="zh-CN" b="0" dirty="0" err="1"/>
@@ -14045,15 +13547,7 @@
             </a:r>
             <a:r>
               <a:rPr lang="en-US" altLang="zh-CN" b="0" dirty="0"/>
-              <a:t>[j].</a:t>
-            </a:r>
-            <a:r>
-              <a:rPr lang="en-US" altLang="zh-CN" b="0" dirty="0" err="1"/>
-              <a:t>elem</a:t>
-            </a:r>
-            <a:r>
-              <a:rPr lang="en-US" altLang="zh-CN" b="0" dirty="0"/>
-              <a:t>=</a:t>
+              <a:t>[j].value=</a:t>
             </a:r>
           </a:p>
           <a:p>
@@ -14073,15 +13567,7 @@
             </a:r>
             <a:r>
               <a:rPr lang="en-US" altLang="zh-CN" b="0" dirty="0"/>
-              <a:t>-&gt;</a:t>
-            </a:r>
-            <a:r>
-              <a:rPr lang="en-US" altLang="zh-CN" b="0" dirty="0" err="1"/>
-              <a:t>tripleArray</a:t>
-            </a:r>
-            <a:r>
-              <a:rPr lang="en-US" altLang="zh-CN" b="0" dirty="0"/>
-              <a:t>[</a:t>
+              <a:t>-&gt;triplets[</a:t>
             </a:r>
             <a:r>
               <a:rPr lang="en-US" altLang="zh-CN" b="0" dirty="0" err="1"/>
@@ -14089,15 +13575,7 @@
             </a:r>
             <a:r>
               <a:rPr lang="en-US" altLang="zh-CN" b="0" dirty="0"/>
-              <a:t>].</a:t>
-            </a:r>
-            <a:r>
-              <a:rPr lang="en-US" altLang="zh-CN" b="0" dirty="0" err="1"/>
-              <a:t>elem</a:t>
-            </a:r>
-            <a:r>
-              <a:rPr lang="en-US" altLang="zh-CN" b="0" dirty="0"/>
-              <a:t>;</a:t>
+              <a:t>].value;</a:t>
             </a:r>
           </a:p>
           <a:p>
@@ -14237,7 +13715,7 @@
 </p:sld>
 </file>
 
-<file path=ppt/slides/slide16.xml><?xml version="1.0" encoding="utf-8"?>
+<file path=ppt/slides/slide15.xml><?xml version="1.0" encoding="utf-8"?>
 <p:sld xmlns:a="http://schemas.openxmlformats.org/drawingml/2006/main" xmlns:r="http://schemas.openxmlformats.org/officeDocument/2006/relationships" xmlns:p="http://schemas.openxmlformats.org/presentationml/2006/main">
   <p:cSld>
     <p:spTree>
@@ -14367,15 +13845,7 @@
                 </a:r>
                 <a:r>
                   <a:rPr lang="en-US" altLang="zh-CN" b="0" dirty="0"/>
-                  <a:t>-&gt;</a:t>
-                </a:r>
-                <a:r>
-                  <a:rPr lang="en-US" altLang="zh-CN" b="0" dirty="0" err="1"/>
-                  <a:t>numOfColumns</a:t>
-                </a:r>
-                <a:r>
-                  <a:rPr lang="en-US" altLang="zh-CN" b="0" dirty="0"/>
-                  <a:t>;</a:t>
+                  <a:t>-&gt;columns;</a:t>
                 </a:r>
               </a:p>
               <a:p>
@@ -14423,15 +13893,7 @@
                 </a:r>
                 <a:r>
                   <a:rPr lang="en-US" altLang="zh-CN" b="0" dirty="0"/>
-                  <a:t>-&gt;</a:t>
-                </a:r>
-                <a:r>
-                  <a:rPr lang="en-US" altLang="zh-CN" b="0" dirty="0" err="1"/>
-                  <a:t>numOfRows</a:t>
-                </a:r>
-                <a:r>
-                  <a:rPr lang="en-US" altLang="zh-CN" b="0" dirty="0"/>
-                  <a:t>;</a:t>
+                  <a:t>-&gt;rows;</a:t>
                 </a:r>
               </a:p>
               <a:p>
@@ -14451,7 +13913,15 @@
                 </a:r>
                 <a:r>
                   <a:rPr lang="en-US" altLang="zh-CN" b="0" dirty="0"/>
-                  <a:t>-&gt;length=</a:t>
+                  <a:t>-&gt;</a:t>
+                </a:r>
+                <a:r>
+                  <a:rPr lang="en-US" altLang="zh-CN" b="0" dirty="0" err="1"/>
+                  <a:t>nonzeros</a:t>
+                </a:r>
+                <a:r>
+                  <a:rPr lang="en-US" altLang="zh-CN" b="0" dirty="0"/>
+                  <a:t>=</a:t>
                 </a:r>
                 <a:r>
                   <a:rPr lang="en-US" altLang="zh-CN" b="0" dirty="0" err="1"/>
@@ -14459,7 +13929,15 @@
                 </a:r>
                 <a:r>
                   <a:rPr lang="en-US" altLang="zh-CN" b="0" dirty="0"/>
-                  <a:t>-&gt;length;</a:t>
+                  <a:t>-&gt;</a:t>
+                </a:r>
+                <a:r>
+                  <a:rPr lang="en-US" altLang="zh-CN" b="0" dirty="0" err="1"/>
+                  <a:t>nonzeros</a:t>
+                </a:r>
+                <a:r>
+                  <a:rPr lang="en-US" altLang="zh-CN" b="0" dirty="0"/>
+                  <a:t>;</a:t>
                 </a:r>
               </a:p>
               <a:p>
@@ -14785,7 +14263,7 @@
 </p:sld>
 </file>
 
-<file path=ppt/slides/slide17.xml><?xml version="1.0" encoding="utf-8"?>
+<file path=ppt/slides/slide16.xml><?xml version="1.0" encoding="utf-8"?>
 <p:sld xmlns:a="http://schemas.openxmlformats.org/drawingml/2006/main" xmlns:r="http://schemas.openxmlformats.org/officeDocument/2006/relationships" xmlns:p="http://schemas.openxmlformats.org/presentationml/2006/main">
   <p:cSld>
     <p:spTree>
@@ -14864,11 +14342,11 @@
             </a:pPr>
             <a:r>
               <a:rPr lang="en-US" altLang="zh-CN" b="0" dirty="0" err="1"/>
-              <a:t>QuickTransposeMatrix</a:t>
+              <a:t>FastTranspose</a:t>
             </a:r>
             <a:r>
               <a:rPr lang="en-US" altLang="zh-CN" b="0" dirty="0"/>
-              <a:t>(S, D) {  // </a:t>
+              <a:t> (S, D) {  // </a:t>
             </a:r>
             <a:r>
               <a:rPr lang="zh-CN" altLang="en-US" b="0" dirty="0"/>
@@ -14986,7 +14464,7 @@
             </a:r>
             <a:r>
               <a:rPr lang="en-US" altLang="zh-CN" b="0" dirty="0" err="1"/>
-              <a:t>S.length</a:t>
+              <a:t>S.nonzeros</a:t>
             </a:r>
             <a:r>
               <a:rPr lang="en-US" altLang="zh-CN" b="0" dirty="0"/>
@@ -16241,7 +15719,7 @@
 </p:sld>
 </file>
 
-<file path=ppt/slides/slide18.xml><?xml version="1.0" encoding="utf-8"?>
+<file path=ppt/slides/slide17.xml><?xml version="1.0" encoding="utf-8"?>
 <p:sld xmlns:a="http://schemas.openxmlformats.org/drawingml/2006/main" xmlns:r="http://schemas.openxmlformats.org/officeDocument/2006/relationships" xmlns:p="http://schemas.openxmlformats.org/presentationml/2006/main">
   <p:cSld>
     <p:spTree>
@@ -16821,6 +16299,252 @@
 </p:sld>
 </file>
 
+<file path=ppt/slides/slide18.xml><?xml version="1.0" encoding="utf-8"?>
+<p:sld xmlns:a="http://schemas.openxmlformats.org/drawingml/2006/main" xmlns:r="http://schemas.openxmlformats.org/officeDocument/2006/relationships" xmlns:p="http://schemas.openxmlformats.org/presentationml/2006/main">
+  <p:cSld>
+    <p:spTree>
+      <p:nvGrpSpPr>
+        <p:cNvPr id="1" name=""/>
+        <p:cNvGrpSpPr/>
+        <p:nvPr/>
+      </p:nvGrpSpPr>
+      <p:grpSpPr>
+        <a:xfrm>
+          <a:off x="0" y="0"/>
+          <a:ext cx="0" cy="0"/>
+          <a:chOff x="0" y="0"/>
+          <a:chExt cx="0" cy="0"/>
+        </a:xfrm>
+      </p:grpSpPr>
+      <p:sp>
+        <p:nvSpPr>
+          <p:cNvPr id="2" name="标题 1">
+            <a:extLst>
+              <a:ext uri="{FF2B5EF4-FFF2-40B4-BE49-F238E27FC236}">
+                <a16:creationId xmlns:a16="http://schemas.microsoft.com/office/drawing/2014/main" id="{5754B905-4CE6-42EA-8914-8E5A0EF91906}"/>
+              </a:ext>
+            </a:extLst>
+          </p:cNvPr>
+          <p:cNvSpPr>
+            <a:spLocks noGrp="1"/>
+          </p:cNvSpPr>
+          <p:nvPr>
+            <p:ph type="title"/>
+          </p:nvPr>
+        </p:nvSpPr>
+        <p:spPr/>
+        <p:txBody>
+          <a:bodyPr/>
+          <a:lstStyle/>
+          <a:p>
+            <a:r>
+              <a:rPr lang="zh-CN" altLang="en-US" dirty="0"/>
+              <a:t>十字链表节点描述</a:t>
+            </a:r>
+          </a:p>
+        </p:txBody>
+      </p:sp>
+      <p:sp>
+        <p:nvSpPr>
+          <p:cNvPr id="3" name="内容占位符 2">
+            <a:extLst>
+              <a:ext uri="{FF2B5EF4-FFF2-40B4-BE49-F238E27FC236}">
+                <a16:creationId xmlns:a16="http://schemas.microsoft.com/office/drawing/2014/main" id="{C56E41B7-A5A4-4A45-BF4D-9DFF6A45DD9D}"/>
+              </a:ext>
+            </a:extLst>
+          </p:cNvPr>
+          <p:cNvSpPr>
+            <a:spLocks noGrp="1"/>
+          </p:cNvSpPr>
+          <p:nvPr>
+            <p:ph idx="1"/>
+          </p:nvPr>
+        </p:nvSpPr>
+        <p:spPr/>
+        <p:txBody>
+          <a:bodyPr/>
+          <a:lstStyle/>
+          <a:p>
+            <a:pPr marL="0" indent="0">
+              <a:lnSpc>
+                <a:spcPct val="125000"/>
+              </a:lnSpc>
+              <a:buNone/>
+            </a:pPr>
+            <a:r>
+              <a:rPr lang="en-US" altLang="zh-CN" b="0" dirty="0"/>
+              <a:t>typedef struct </a:t>
+            </a:r>
+            <a:r>
+              <a:rPr lang="en-US" altLang="zh-CN" b="0" dirty="0" err="1"/>
+              <a:t>CrossNode</a:t>
+            </a:r>
+            <a:r>
+              <a:rPr lang="en-US" altLang="zh-CN" b="0" dirty="0"/>
+              <a:t> {</a:t>
+            </a:r>
+          </a:p>
+          <a:p>
+            <a:pPr marL="0" indent="0">
+              <a:lnSpc>
+                <a:spcPct val="125000"/>
+              </a:lnSpc>
+              <a:buNone/>
+            </a:pPr>
+            <a:r>
+              <a:rPr lang="en-US" altLang="zh-CN" b="0" dirty="0"/>
+              <a:t>    int row;   // </a:t>
+            </a:r>
+            <a:r>
+              <a:rPr lang="zh-CN" altLang="en-US" b="0" dirty="0"/>
+              <a:t>行号</a:t>
+            </a:r>
+            <a:endParaRPr lang="en-US" altLang="zh-CN" b="0" dirty="0"/>
+          </a:p>
+          <a:p>
+            <a:pPr marL="0" indent="0">
+              <a:lnSpc>
+                <a:spcPct val="125000"/>
+              </a:lnSpc>
+              <a:buNone/>
+            </a:pPr>
+            <a:r>
+              <a:rPr lang="en-US" altLang="zh-CN" b="0" dirty="0"/>
+              <a:t>    int column;   // </a:t>
+            </a:r>
+            <a:r>
+              <a:rPr lang="zh-CN" altLang="en-US" b="0" dirty="0"/>
+              <a:t>列号</a:t>
+            </a:r>
+            <a:endParaRPr lang="en-US" altLang="zh-CN" b="0" dirty="0"/>
+          </a:p>
+          <a:p>
+            <a:pPr marL="0" indent="0">
+              <a:lnSpc>
+                <a:spcPct val="125000"/>
+              </a:lnSpc>
+              <a:buNone/>
+            </a:pPr>
+            <a:r>
+              <a:rPr lang="en-US" altLang="zh-CN" b="0" dirty="0"/>
+              <a:t>    </a:t>
+            </a:r>
+            <a:r>
+              <a:rPr lang="en-US" altLang="zh-CN" b="0" dirty="0" err="1"/>
+              <a:t>MatrixElem</a:t>
+            </a:r>
+            <a:r>
+              <a:rPr lang="en-US" altLang="zh-CN" b="0" dirty="0"/>
+              <a:t> value;   // </a:t>
+            </a:r>
+            <a:r>
+              <a:rPr lang="zh-CN" altLang="en-US" b="0" dirty="0"/>
+              <a:t>数值</a:t>
+            </a:r>
+            <a:endParaRPr lang="en-US" altLang="zh-CN" b="0" dirty="0"/>
+          </a:p>
+          <a:p>
+            <a:pPr marL="0" indent="0">
+              <a:lnSpc>
+                <a:spcPct val="125000"/>
+              </a:lnSpc>
+              <a:buNone/>
+            </a:pPr>
+            <a:r>
+              <a:rPr lang="en-US" altLang="zh-CN" b="0" dirty="0"/>
+              <a:t>    struct </a:t>
+            </a:r>
+            <a:r>
+              <a:rPr lang="en-US" altLang="zh-CN" b="0" dirty="0" err="1"/>
+              <a:t>CrossNode</a:t>
+            </a:r>
+            <a:r>
+              <a:rPr lang="en-US" altLang="zh-CN" b="0" dirty="0"/>
+              <a:t> *</a:t>
+            </a:r>
+            <a:r>
+              <a:rPr lang="en-US" altLang="zh-CN" b="0" dirty="0" err="1"/>
+              <a:t>pRight</a:t>
+            </a:r>
+            <a:r>
+              <a:rPr lang="en-US" altLang="zh-CN" b="0" dirty="0"/>
+              <a:t>;     // </a:t>
+            </a:r>
+            <a:r>
+              <a:rPr lang="zh-CN" altLang="en-US" b="0" dirty="0"/>
+              <a:t>同行下一个节点</a:t>
+            </a:r>
+            <a:endParaRPr lang="en-US" altLang="zh-CN" b="0" dirty="0"/>
+          </a:p>
+          <a:p>
+            <a:pPr marL="0" indent="0">
+              <a:lnSpc>
+                <a:spcPct val="125000"/>
+              </a:lnSpc>
+              <a:buNone/>
+            </a:pPr>
+            <a:r>
+              <a:rPr lang="en-US" altLang="zh-CN" b="0" dirty="0"/>
+              <a:t>    struct </a:t>
+            </a:r>
+            <a:r>
+              <a:rPr lang="en-US" altLang="zh-CN" b="0" dirty="0" err="1"/>
+              <a:t>CrossNode</a:t>
+            </a:r>
+            <a:r>
+              <a:rPr lang="en-US" altLang="zh-CN" b="0" dirty="0"/>
+              <a:t> *</a:t>
+            </a:r>
+            <a:r>
+              <a:rPr lang="en-US" altLang="zh-CN" b="0" dirty="0" err="1"/>
+              <a:t>pDown</a:t>
+            </a:r>
+            <a:r>
+              <a:rPr lang="en-US" altLang="zh-CN" b="0" dirty="0"/>
+              <a:t>;   // </a:t>
+            </a:r>
+            <a:r>
+              <a:rPr lang="zh-CN" altLang="en-US" b="0" dirty="0"/>
+              <a:t>同列下一个节点</a:t>
+            </a:r>
+            <a:endParaRPr lang="en-US" altLang="zh-CN" b="0" dirty="0"/>
+          </a:p>
+          <a:p>
+            <a:pPr marL="0" indent="0">
+              <a:lnSpc>
+                <a:spcPct val="125000"/>
+              </a:lnSpc>
+              <a:buNone/>
+            </a:pPr>
+            <a:r>
+              <a:rPr lang="en-US" altLang="zh-CN" b="0" dirty="0"/>
+              <a:t>} </a:t>
+            </a:r>
+            <a:r>
+              <a:rPr lang="en-US" altLang="zh-CN" b="0" dirty="0" err="1"/>
+              <a:t>CrossNode</a:t>
+            </a:r>
+            <a:r>
+              <a:rPr lang="en-US" altLang="zh-CN" b="0" dirty="0"/>
+              <a:t>;</a:t>
+            </a:r>
+            <a:endParaRPr lang="zh-CN" altLang="en-US" b="0" dirty="0"/>
+          </a:p>
+        </p:txBody>
+      </p:sp>
+    </p:spTree>
+    <p:extLst>
+      <p:ext uri="{BB962C8B-B14F-4D97-AF65-F5344CB8AC3E}">
+        <p14:creationId xmlns:p14="http://schemas.microsoft.com/office/powerpoint/2010/main" val="1327516914"/>
+      </p:ext>
+    </p:extLst>
+  </p:cSld>
+  <p:clrMapOvr>
+    <a:masterClrMapping/>
+  </p:clrMapOvr>
+</p:sld>
+</file>
+
 <file path=ppt/slides/slide19.xml><?xml version="1.0" encoding="utf-8"?>
 <p:sld xmlns:a="http://schemas.openxmlformats.org/drawingml/2006/main" xmlns:r="http://schemas.openxmlformats.org/officeDocument/2006/relationships" xmlns:p="http://schemas.openxmlformats.org/presentationml/2006/main">
   <p:cSld>
@@ -16861,7 +16585,7 @@
           <a:p>
             <a:r>
               <a:rPr lang="zh-CN" altLang="en-US" dirty="0"/>
-              <a:t>十字链表节点描述</a:t>
+              <a:t>用十字链表描述稀疏矩阵</a:t>
             </a:r>
           </a:p>
         </p:txBody>
@@ -16895,15 +16619,7 @@
             </a:pPr>
             <a:r>
               <a:rPr lang="en-US" altLang="zh-CN" b="0" dirty="0"/>
-              <a:t>typedef struct </a:t>
-            </a:r>
-            <a:r>
-              <a:rPr lang="en-US" altLang="zh-CN" b="0" dirty="0" err="1"/>
-              <a:t>CrossNode</a:t>
-            </a:r>
-            <a:r>
-              <a:rPr lang="en-US" altLang="zh-CN" b="0" dirty="0"/>
-              <a:t> {</a:t>
+              <a:t>typedef struct {</a:t>
             </a:r>
           </a:p>
           <a:p>
@@ -16915,13 +16631,24 @@
             </a:pPr>
             <a:r>
               <a:rPr lang="en-US" altLang="zh-CN" b="0" dirty="0"/>
-              <a:t>    int row;   // </a:t>
-            </a:r>
-            <a:r>
-              <a:rPr lang="zh-CN" altLang="en-US" b="0" dirty="0"/>
-              <a:t>行号</a:t>
-            </a:r>
-            <a:endParaRPr lang="en-US" altLang="zh-CN" b="0" dirty="0"/>
+              <a:t>    </a:t>
+            </a:r>
+            <a:r>
+              <a:rPr lang="en-US" altLang="zh-CN" b="0" dirty="0" err="1"/>
+              <a:t>CrossNode</a:t>
+            </a:r>
+            <a:r>
+              <a:rPr lang="en-US" altLang="zh-CN" b="0" dirty="0"/>
+              <a:t>* </a:t>
+            </a:r>
+            <a:r>
+              <a:rPr lang="en-US" altLang="zh-CN" b="0" dirty="0" err="1"/>
+              <a:t>rowHeads</a:t>
+            </a:r>
+            <a:r>
+              <a:rPr lang="en-US" altLang="zh-CN" b="0" dirty="0"/>
+              <a:t>[];</a:t>
+            </a:r>
           </a:p>
           <a:p>
             <a:pPr marL="0" indent="0">
@@ -16932,13 +16659,24 @@
             </a:pPr>
             <a:r>
               <a:rPr lang="en-US" altLang="zh-CN" b="0" dirty="0"/>
-              <a:t>    int column;   // </a:t>
-            </a:r>
-            <a:r>
-              <a:rPr lang="zh-CN" altLang="en-US" b="0" dirty="0"/>
-              <a:t>列号</a:t>
-            </a:r>
-            <a:endParaRPr lang="en-US" altLang="zh-CN" b="0" dirty="0"/>
+              <a:t>    </a:t>
+            </a:r>
+            <a:r>
+              <a:rPr lang="en-US" altLang="zh-CN" b="0" dirty="0" err="1"/>
+              <a:t>CrossNode</a:t>
+            </a:r>
+            <a:r>
+              <a:rPr lang="en-US" altLang="zh-CN" b="0" dirty="0"/>
+              <a:t>* </a:t>
+            </a:r>
+            <a:r>
+              <a:rPr lang="en-US" altLang="zh-CN" b="0" dirty="0" err="1"/>
+              <a:t>columnHeads</a:t>
+            </a:r>
+            <a:r>
+              <a:rPr lang="en-US" altLang="zh-CN" b="0" dirty="0"/>
+              <a:t>[];</a:t>
+            </a:r>
           </a:p>
           <a:p>
             <a:pPr marL="0" indent="0">
@@ -16949,21 +16687,8 @@
             </a:pPr>
             <a:r>
               <a:rPr lang="en-US" altLang="zh-CN" b="0" dirty="0"/>
-              <a:t>    </a:t>
-            </a:r>
-            <a:r>
-              <a:rPr lang="en-US" altLang="zh-CN" b="0" dirty="0" err="1"/>
-              <a:t>MatrixElem</a:t>
-            </a:r>
-            <a:r>
-              <a:rPr lang="en-US" altLang="zh-CN" b="0" dirty="0"/>
-              <a:t> value;   // </a:t>
-            </a:r>
-            <a:r>
-              <a:rPr lang="zh-CN" altLang="en-US" b="0" dirty="0"/>
-              <a:t>数值</a:t>
-            </a:r>
-            <a:endParaRPr lang="en-US" altLang="zh-CN" b="0" dirty="0"/>
+              <a:t>    int rows;</a:t>
+            </a:r>
           </a:p>
           <a:p>
             <a:pPr marL="0" indent="0">
@@ -16974,29 +16699,8 @@
             </a:pPr>
             <a:r>
               <a:rPr lang="en-US" altLang="zh-CN" b="0" dirty="0"/>
-              <a:t>    struct </a:t>
-            </a:r>
-            <a:r>
-              <a:rPr lang="en-US" altLang="zh-CN" b="0" dirty="0" err="1"/>
-              <a:t>CrossNode</a:t>
-            </a:r>
-            <a:r>
-              <a:rPr lang="en-US" altLang="zh-CN" b="0" dirty="0"/>
-              <a:t> *</a:t>
-            </a:r>
-            <a:r>
-              <a:rPr lang="en-US" altLang="zh-CN" b="0" dirty="0" err="1"/>
-              <a:t>pRight</a:t>
-            </a:r>
-            <a:r>
-              <a:rPr lang="en-US" altLang="zh-CN" b="0" dirty="0"/>
-              <a:t>;     // </a:t>
-            </a:r>
-            <a:r>
-              <a:rPr lang="zh-CN" altLang="en-US" b="0" dirty="0"/>
-              <a:t>同行下一个节点</a:t>
-            </a:r>
-            <a:endParaRPr lang="en-US" altLang="zh-CN" b="0" dirty="0"/>
+              <a:t>    int columns;</a:t>
+            </a:r>
           </a:p>
           <a:p>
             <a:pPr marL="0" indent="0">
@@ -17007,29 +16711,16 @@
             </a:pPr>
             <a:r>
               <a:rPr lang="en-US" altLang="zh-CN" b="0" dirty="0"/>
-              <a:t>    struct </a:t>
+              <a:t>    int </a:t>
             </a:r>
             <a:r>
               <a:rPr lang="en-US" altLang="zh-CN" b="0" dirty="0" err="1"/>
-              <a:t>CrossNode</a:t>
+              <a:t>nonzeros</a:t>
             </a:r>
             <a:r>
               <a:rPr lang="en-US" altLang="zh-CN" b="0" dirty="0"/>
-              <a:t> *</a:t>
-            </a:r>
-            <a:r>
-              <a:rPr lang="en-US" altLang="zh-CN" b="0" dirty="0" err="1"/>
-              <a:t>pUnder</a:t>
-            </a:r>
-            <a:r>
-              <a:rPr lang="en-US" altLang="zh-CN" b="0" dirty="0"/>
-              <a:t>;   // </a:t>
-            </a:r>
-            <a:r>
-              <a:rPr lang="zh-CN" altLang="en-US" b="0" dirty="0"/>
-              <a:t>同列下一个节点</a:t>
-            </a:r>
-            <a:endParaRPr lang="en-US" altLang="zh-CN" b="0" dirty="0"/>
+              <a:t>;</a:t>
+            </a:r>
           </a:p>
           <a:p>
             <a:pPr marL="0" indent="0">
@@ -17044,7 +16735,7 @@
             </a:r>
             <a:r>
               <a:rPr lang="en-US" altLang="zh-CN" b="0" dirty="0" err="1"/>
-              <a:t>CrossNode</a:t>
+              <a:t>SparseMatrix</a:t>
             </a:r>
             <a:r>
               <a:rPr lang="en-US" altLang="zh-CN" b="0" dirty="0"/>
@@ -17057,7 +16748,7 @@
     </p:spTree>
     <p:extLst>
       <p:ext uri="{BB962C8B-B14F-4D97-AF65-F5344CB8AC3E}">
-        <p14:creationId xmlns:p14="http://schemas.microsoft.com/office/powerpoint/2010/main" val="1327516914"/>
+        <p14:creationId xmlns:p14="http://schemas.microsoft.com/office/powerpoint/2010/main" val="2528957429"/>
       </p:ext>
     </p:extLst>
   </p:cSld>
@@ -17256,1085 +16947,6 @@
           <p:cNvPr id="2" name="标题 1">
             <a:extLst>
               <a:ext uri="{FF2B5EF4-FFF2-40B4-BE49-F238E27FC236}">
-                <a16:creationId xmlns:a16="http://schemas.microsoft.com/office/drawing/2014/main" id="{5754B905-4CE6-42EA-8914-8E5A0EF91906}"/>
-              </a:ext>
-            </a:extLst>
-          </p:cNvPr>
-          <p:cNvSpPr>
-            <a:spLocks noGrp="1"/>
-          </p:cNvSpPr>
-          <p:nvPr>
-            <p:ph type="title"/>
-          </p:nvPr>
-        </p:nvSpPr>
-        <p:spPr/>
-        <p:txBody>
-          <a:bodyPr/>
-          <a:lstStyle/>
-          <a:p>
-            <a:r>
-              <a:rPr lang="zh-CN" altLang="en-US" dirty="0"/>
-              <a:t>用十字链表描述稀疏矩阵</a:t>
-            </a:r>
-          </a:p>
-        </p:txBody>
-      </p:sp>
-      <p:sp>
-        <p:nvSpPr>
-          <p:cNvPr id="3" name="内容占位符 2">
-            <a:extLst>
-              <a:ext uri="{FF2B5EF4-FFF2-40B4-BE49-F238E27FC236}">
-                <a16:creationId xmlns:a16="http://schemas.microsoft.com/office/drawing/2014/main" id="{C56E41B7-A5A4-4A45-BF4D-9DFF6A45DD9D}"/>
-              </a:ext>
-            </a:extLst>
-          </p:cNvPr>
-          <p:cNvSpPr>
-            <a:spLocks noGrp="1"/>
-          </p:cNvSpPr>
-          <p:nvPr>
-            <p:ph idx="1"/>
-          </p:nvPr>
-        </p:nvSpPr>
-        <p:spPr/>
-        <p:txBody>
-          <a:bodyPr/>
-          <a:lstStyle/>
-          <a:p>
-            <a:pPr marL="0" indent="0">
-              <a:lnSpc>
-                <a:spcPct val="125000"/>
-              </a:lnSpc>
-              <a:buNone/>
-            </a:pPr>
-            <a:r>
-              <a:rPr lang="en-US" altLang="zh-CN" b="0" dirty="0"/>
-              <a:t>typedef struct {</a:t>
-            </a:r>
-          </a:p>
-          <a:p>
-            <a:pPr marL="0" indent="0">
-              <a:lnSpc>
-                <a:spcPct val="125000"/>
-              </a:lnSpc>
-              <a:buNone/>
-            </a:pPr>
-            <a:r>
-              <a:rPr lang="en-US" altLang="zh-CN" b="0" dirty="0"/>
-              <a:t>    </a:t>
-            </a:r>
-            <a:r>
-              <a:rPr lang="en-US" altLang="zh-CN" b="0" dirty="0" err="1"/>
-              <a:t>CrossNode</a:t>
-            </a:r>
-            <a:r>
-              <a:rPr lang="en-US" altLang="zh-CN" b="0" dirty="0"/>
-              <a:t>* </a:t>
-            </a:r>
-            <a:r>
-              <a:rPr lang="en-US" altLang="zh-CN" b="0" dirty="0" err="1"/>
-              <a:t>pRowHead</a:t>
-            </a:r>
-            <a:r>
-              <a:rPr lang="en-US" altLang="zh-CN" b="0" dirty="0"/>
-              <a:t>[];</a:t>
-            </a:r>
-          </a:p>
-          <a:p>
-            <a:pPr marL="0" indent="0">
-              <a:lnSpc>
-                <a:spcPct val="125000"/>
-              </a:lnSpc>
-              <a:buNone/>
-            </a:pPr>
-            <a:r>
-              <a:rPr lang="en-US" altLang="zh-CN" b="0" dirty="0"/>
-              <a:t>    </a:t>
-            </a:r>
-            <a:r>
-              <a:rPr lang="en-US" altLang="zh-CN" b="0" dirty="0" err="1"/>
-              <a:t>CrossNode</a:t>
-            </a:r>
-            <a:r>
-              <a:rPr lang="en-US" altLang="zh-CN" b="0" dirty="0"/>
-              <a:t>* </a:t>
-            </a:r>
-            <a:r>
-              <a:rPr lang="en-US" altLang="zh-CN" b="0" dirty="0" err="1"/>
-              <a:t>pColumnHead</a:t>
-            </a:r>
-            <a:r>
-              <a:rPr lang="en-US" altLang="zh-CN" b="0" dirty="0"/>
-              <a:t>[];</a:t>
-            </a:r>
-          </a:p>
-          <a:p>
-            <a:pPr marL="0" indent="0">
-              <a:lnSpc>
-                <a:spcPct val="125000"/>
-              </a:lnSpc>
-              <a:buNone/>
-            </a:pPr>
-            <a:r>
-              <a:rPr lang="en-US" altLang="zh-CN" b="0" dirty="0"/>
-              <a:t>    int </a:t>
-            </a:r>
-            <a:r>
-              <a:rPr lang="en-US" altLang="zh-CN" b="0" dirty="0" err="1"/>
-              <a:t>numOfRows</a:t>
-            </a:r>
-            <a:r>
-              <a:rPr lang="en-US" altLang="zh-CN" b="0" dirty="0"/>
-              <a:t>;</a:t>
-            </a:r>
-          </a:p>
-          <a:p>
-            <a:pPr marL="0" indent="0">
-              <a:lnSpc>
-                <a:spcPct val="125000"/>
-              </a:lnSpc>
-              <a:buNone/>
-            </a:pPr>
-            <a:r>
-              <a:rPr lang="en-US" altLang="zh-CN" b="0" dirty="0"/>
-              <a:t>    int </a:t>
-            </a:r>
-            <a:r>
-              <a:rPr lang="en-US" altLang="zh-CN" b="0" dirty="0" err="1"/>
-              <a:t>numOfColumns</a:t>
-            </a:r>
-            <a:r>
-              <a:rPr lang="en-US" altLang="zh-CN" b="0" dirty="0"/>
-              <a:t>;</a:t>
-            </a:r>
-          </a:p>
-          <a:p>
-            <a:pPr marL="0" indent="0">
-              <a:lnSpc>
-                <a:spcPct val="125000"/>
-              </a:lnSpc>
-              <a:buNone/>
-            </a:pPr>
-            <a:r>
-              <a:rPr lang="en-US" altLang="zh-CN" b="0" dirty="0"/>
-              <a:t>    int </a:t>
-            </a:r>
-            <a:r>
-              <a:rPr lang="en-US" altLang="zh-CN" b="0" dirty="0" err="1"/>
-              <a:t>numOfNonzeros</a:t>
-            </a:r>
-            <a:r>
-              <a:rPr lang="en-US" altLang="zh-CN" b="0" dirty="0"/>
-              <a:t>;</a:t>
-            </a:r>
-          </a:p>
-          <a:p>
-            <a:pPr marL="0" indent="0">
-              <a:lnSpc>
-                <a:spcPct val="125000"/>
-              </a:lnSpc>
-              <a:buNone/>
-            </a:pPr>
-            <a:r>
-              <a:rPr lang="en-US" altLang="zh-CN" b="0" dirty="0"/>
-              <a:t>} </a:t>
-            </a:r>
-            <a:r>
-              <a:rPr lang="en-US" altLang="zh-CN" b="0" dirty="0" err="1"/>
-              <a:t>SparseMatrix</a:t>
-            </a:r>
-            <a:r>
-              <a:rPr lang="en-US" altLang="zh-CN" b="0" dirty="0"/>
-              <a:t>;</a:t>
-            </a:r>
-            <a:endParaRPr lang="zh-CN" altLang="en-US" b="0" dirty="0"/>
-          </a:p>
-        </p:txBody>
-      </p:sp>
-    </p:spTree>
-    <p:extLst>
-      <p:ext uri="{BB962C8B-B14F-4D97-AF65-F5344CB8AC3E}">
-        <p14:creationId xmlns:p14="http://schemas.microsoft.com/office/powerpoint/2010/main" val="2528957429"/>
-      </p:ext>
-    </p:extLst>
-  </p:cSld>
-  <p:clrMapOvr>
-    <a:masterClrMapping/>
-  </p:clrMapOvr>
-</p:sld>
-</file>
-
-<file path=ppt/slides/slide21.xml><?xml version="1.0" encoding="utf-8"?>
-<p:sld xmlns:a="http://schemas.openxmlformats.org/drawingml/2006/main" xmlns:r="http://schemas.openxmlformats.org/officeDocument/2006/relationships" xmlns:p="http://schemas.openxmlformats.org/presentationml/2006/main">
-  <p:cSld>
-    <p:spTree>
-      <p:nvGrpSpPr>
-        <p:cNvPr id="1" name=""/>
-        <p:cNvGrpSpPr/>
-        <p:nvPr/>
-      </p:nvGrpSpPr>
-      <p:grpSpPr>
-        <a:xfrm>
-          <a:off x="0" y="0"/>
-          <a:ext cx="0" cy="0"/>
-          <a:chOff x="0" y="0"/>
-          <a:chExt cx="0" cy="0"/>
-        </a:xfrm>
-      </p:grpSpPr>
-      <p:sp>
-        <p:nvSpPr>
-          <p:cNvPr id="2" name="标题 1">
-            <a:extLst>
-              <a:ext uri="{FF2B5EF4-FFF2-40B4-BE49-F238E27FC236}">
-                <a16:creationId xmlns:a16="http://schemas.microsoft.com/office/drawing/2014/main" id="{5754B905-4CE6-42EA-8914-8E5A0EF91906}"/>
-              </a:ext>
-            </a:extLst>
-          </p:cNvPr>
-          <p:cNvSpPr>
-            <a:spLocks noGrp="1"/>
-          </p:cNvSpPr>
-          <p:nvPr>
-            <p:ph type="title"/>
-          </p:nvPr>
-        </p:nvSpPr>
-        <p:spPr/>
-        <p:txBody>
-          <a:bodyPr/>
-          <a:lstStyle/>
-          <a:p>
-            <a:r>
-              <a:rPr lang="zh-CN" altLang="en-US" dirty="0"/>
-              <a:t>对稀疏矩阵的操作</a:t>
-            </a:r>
-          </a:p>
-        </p:txBody>
-      </p:sp>
-      <p:sp>
-        <p:nvSpPr>
-          <p:cNvPr id="3" name="内容占位符 2">
-            <a:extLst>
-              <a:ext uri="{FF2B5EF4-FFF2-40B4-BE49-F238E27FC236}">
-                <a16:creationId xmlns:a16="http://schemas.microsoft.com/office/drawing/2014/main" id="{C56E41B7-A5A4-4A45-BF4D-9DFF6A45DD9D}"/>
-              </a:ext>
-            </a:extLst>
-          </p:cNvPr>
-          <p:cNvSpPr>
-            <a:spLocks noGrp="1"/>
-          </p:cNvSpPr>
-          <p:nvPr>
-            <p:ph idx="1"/>
-          </p:nvPr>
-        </p:nvSpPr>
-        <p:spPr/>
-        <p:txBody>
-          <a:bodyPr/>
-          <a:lstStyle/>
-          <a:p>
-            <a:pPr marL="0" indent="0">
-              <a:lnSpc>
-                <a:spcPct val="125000"/>
-              </a:lnSpc>
-              <a:buNone/>
-            </a:pPr>
-            <a:r>
-              <a:rPr lang="en-US" altLang="zh-CN" b="0" dirty="0"/>
-              <a:t>Status </a:t>
-            </a:r>
-            <a:r>
-              <a:rPr lang="en-US" altLang="zh-CN" b="0" dirty="0" err="1"/>
-              <a:t>InitSparseMatrix</a:t>
-            </a:r>
-            <a:r>
-              <a:rPr lang="en-US" altLang="zh-CN" b="0" dirty="0"/>
-              <a:t>(</a:t>
-            </a:r>
-            <a:r>
-              <a:rPr lang="en-US" altLang="zh-CN" b="0" dirty="0" err="1"/>
-              <a:t>SparseMatrix</a:t>
-            </a:r>
-            <a:r>
-              <a:rPr lang="en-US" altLang="zh-CN" b="0" dirty="0"/>
-              <a:t>* </a:t>
-            </a:r>
-            <a:r>
-              <a:rPr lang="en-US" altLang="zh-CN" b="0" dirty="0" err="1"/>
-              <a:t>pMatrix</a:t>
-            </a:r>
-            <a:r>
-              <a:rPr lang="en-US" altLang="zh-CN" b="0" dirty="0"/>
-              <a:t>,</a:t>
-            </a:r>
-          </a:p>
-          <a:p>
-            <a:pPr marL="0" indent="0">
-              <a:lnSpc>
-                <a:spcPct val="125000"/>
-              </a:lnSpc>
-              <a:buNone/>
-            </a:pPr>
-            <a:r>
-              <a:rPr lang="en-US" altLang="zh-CN" b="0" dirty="0"/>
-              <a:t>                                                 int rows, int columns);</a:t>
-            </a:r>
-          </a:p>
-          <a:p>
-            <a:pPr marL="0" indent="0">
-              <a:lnSpc>
-                <a:spcPct val="125000"/>
-              </a:lnSpc>
-              <a:buNone/>
-            </a:pPr>
-            <a:r>
-              <a:rPr lang="en-US" altLang="zh-CN" b="0" dirty="0"/>
-              <a:t>Status </a:t>
-            </a:r>
-            <a:r>
-              <a:rPr lang="en-US" altLang="zh-CN" b="0" dirty="0" err="1"/>
-              <a:t>FreeSparseMatrix</a:t>
-            </a:r>
-            <a:r>
-              <a:rPr lang="en-US" altLang="zh-CN" b="0" dirty="0"/>
-              <a:t>(</a:t>
-            </a:r>
-            <a:r>
-              <a:rPr lang="en-US" altLang="zh-CN" b="0" dirty="0" err="1"/>
-              <a:t>SparseMatrix</a:t>
-            </a:r>
-            <a:r>
-              <a:rPr lang="en-US" altLang="zh-CN" b="0" dirty="0"/>
-              <a:t>* </a:t>
-            </a:r>
-            <a:r>
-              <a:rPr lang="en-US" altLang="zh-CN" b="0" dirty="0" err="1"/>
-              <a:t>pMatrix</a:t>
-            </a:r>
-            <a:r>
-              <a:rPr lang="en-US" altLang="zh-CN" b="0" dirty="0"/>
-              <a:t>);</a:t>
-            </a:r>
-          </a:p>
-          <a:p>
-            <a:pPr marL="0" indent="0">
-              <a:lnSpc>
-                <a:spcPct val="125000"/>
-              </a:lnSpc>
-              <a:buNone/>
-            </a:pPr>
-            <a:r>
-              <a:rPr lang="en-US" altLang="zh-CN" b="0" dirty="0"/>
-              <a:t>Status </a:t>
-            </a:r>
-            <a:r>
-              <a:rPr lang="en-US" altLang="zh-CN" b="0" dirty="0" err="1"/>
-              <a:t>AssignSparseMatrixElem</a:t>
-            </a:r>
-            <a:r>
-              <a:rPr lang="en-US" altLang="zh-CN" b="0" dirty="0"/>
-              <a:t>(……);</a:t>
-            </a:r>
-          </a:p>
-          <a:p>
-            <a:pPr marL="0" indent="0">
-              <a:lnSpc>
-                <a:spcPct val="125000"/>
-              </a:lnSpc>
-              <a:buNone/>
-            </a:pPr>
-            <a:r>
-              <a:rPr lang="en-US" altLang="zh-CN" b="0" dirty="0"/>
-              <a:t>Status </a:t>
-            </a:r>
-            <a:r>
-              <a:rPr lang="en-US" altLang="zh-CN" b="0" dirty="0" err="1"/>
-              <a:t>AddSparseMatrix</a:t>
-            </a:r>
-            <a:r>
-              <a:rPr lang="en-US" altLang="zh-CN" b="0" dirty="0"/>
-              <a:t>(…..);</a:t>
-            </a:r>
-          </a:p>
-          <a:p>
-            <a:pPr marL="0" indent="0">
-              <a:lnSpc>
-                <a:spcPct val="125000"/>
-              </a:lnSpc>
-              <a:buNone/>
-            </a:pPr>
-            <a:r>
-              <a:rPr lang="en-US" altLang="zh-CN" b="0" dirty="0"/>
-              <a:t>Status </a:t>
-            </a:r>
-            <a:r>
-              <a:rPr lang="en-US" altLang="zh-CN" b="0" dirty="0" err="1"/>
-              <a:t>SubSparseMatrix</a:t>
-            </a:r>
-            <a:r>
-              <a:rPr lang="en-US" altLang="zh-CN" b="0" dirty="0"/>
-              <a:t>(……);</a:t>
-            </a:r>
-          </a:p>
-          <a:p>
-            <a:pPr marL="0" indent="0">
-              <a:lnSpc>
-                <a:spcPct val="125000"/>
-              </a:lnSpc>
-              <a:buNone/>
-            </a:pPr>
-            <a:r>
-              <a:rPr lang="en-US" altLang="zh-CN" b="0" dirty="0"/>
-              <a:t>Status </a:t>
-            </a:r>
-            <a:r>
-              <a:rPr lang="en-US" altLang="zh-CN" b="0" dirty="0" err="1"/>
-              <a:t>TransposeSparseMatrix</a:t>
-            </a:r>
-            <a:r>
-              <a:rPr lang="en-US" altLang="zh-CN" b="0" dirty="0"/>
-              <a:t>(……);</a:t>
-            </a:r>
-          </a:p>
-          <a:p>
-            <a:pPr marL="0" indent="0">
-              <a:lnSpc>
-                <a:spcPct val="125000"/>
-              </a:lnSpc>
-              <a:buNone/>
-            </a:pPr>
-            <a:r>
-              <a:rPr lang="en-US" altLang="zh-CN" b="0" dirty="0"/>
-              <a:t>……</a:t>
-            </a:r>
-            <a:endParaRPr lang="zh-CN" altLang="en-US" b="0" dirty="0"/>
-          </a:p>
-        </p:txBody>
-      </p:sp>
-    </p:spTree>
-    <p:extLst>
-      <p:ext uri="{BB962C8B-B14F-4D97-AF65-F5344CB8AC3E}">
-        <p14:creationId xmlns:p14="http://schemas.microsoft.com/office/powerpoint/2010/main" val="3225772593"/>
-      </p:ext>
-    </p:extLst>
-  </p:cSld>
-  <p:clrMapOvr>
-    <a:masterClrMapping/>
-  </p:clrMapOvr>
-</p:sld>
-</file>
-
-<file path=ppt/slides/slide22.xml><?xml version="1.0" encoding="utf-8"?>
-<p:sld xmlns:a="http://schemas.openxmlformats.org/drawingml/2006/main" xmlns:r="http://schemas.openxmlformats.org/officeDocument/2006/relationships" xmlns:p="http://schemas.openxmlformats.org/presentationml/2006/main">
-  <p:cSld>
-    <p:spTree>
-      <p:nvGrpSpPr>
-        <p:cNvPr id="1" name=""/>
-        <p:cNvGrpSpPr/>
-        <p:nvPr/>
-      </p:nvGrpSpPr>
-      <p:grpSpPr>
-        <a:xfrm>
-          <a:off x="0" y="0"/>
-          <a:ext cx="0" cy="0"/>
-          <a:chOff x="0" y="0"/>
-          <a:chExt cx="0" cy="0"/>
-        </a:xfrm>
-      </p:grpSpPr>
-      <p:sp>
-        <p:nvSpPr>
-          <p:cNvPr id="2" name="标题 1">
-            <a:extLst>
-              <a:ext uri="{FF2B5EF4-FFF2-40B4-BE49-F238E27FC236}">
-                <a16:creationId xmlns:a16="http://schemas.microsoft.com/office/drawing/2014/main" id="{5754B905-4CE6-42EA-8914-8E5A0EF91906}"/>
-              </a:ext>
-            </a:extLst>
-          </p:cNvPr>
-          <p:cNvSpPr>
-            <a:spLocks noGrp="1"/>
-          </p:cNvSpPr>
-          <p:nvPr>
-            <p:ph type="title"/>
-          </p:nvPr>
-        </p:nvSpPr>
-        <p:spPr/>
-        <p:txBody>
-          <a:bodyPr/>
-          <a:lstStyle/>
-          <a:p>
-            <a:r>
-              <a:rPr lang="zh-CN" altLang="en-US" dirty="0"/>
-              <a:t>初始化稀疏矩阵</a:t>
-            </a:r>
-          </a:p>
-        </p:txBody>
-      </p:sp>
-      <p:sp>
-        <p:nvSpPr>
-          <p:cNvPr id="3" name="内容占位符 2">
-            <a:extLst>
-              <a:ext uri="{FF2B5EF4-FFF2-40B4-BE49-F238E27FC236}">
-                <a16:creationId xmlns:a16="http://schemas.microsoft.com/office/drawing/2014/main" id="{C56E41B7-A5A4-4A45-BF4D-9DFF6A45DD9D}"/>
-              </a:ext>
-            </a:extLst>
-          </p:cNvPr>
-          <p:cNvSpPr>
-            <a:spLocks noGrp="1"/>
-          </p:cNvSpPr>
-          <p:nvPr>
-            <p:ph idx="1"/>
-          </p:nvPr>
-        </p:nvSpPr>
-        <p:spPr>
-          <a:xfrm>
-            <a:off x="304800" y="1371600"/>
-            <a:ext cx="11887200" cy="5181600"/>
-          </a:xfrm>
-        </p:spPr>
-        <p:txBody>
-          <a:bodyPr/>
-          <a:lstStyle/>
-          <a:p>
-            <a:pPr marL="0" indent="0">
-              <a:lnSpc>
-                <a:spcPct val="100000"/>
-              </a:lnSpc>
-              <a:buNone/>
-            </a:pPr>
-            <a:r>
-              <a:rPr lang="en-US" altLang="zh-CN" b="0" dirty="0"/>
-              <a:t>Status </a:t>
-            </a:r>
-            <a:r>
-              <a:rPr lang="en-US" altLang="zh-CN" b="0" dirty="0" err="1"/>
-              <a:t>InitSparseMatrix</a:t>
-            </a:r>
-            <a:r>
-              <a:rPr lang="en-US" altLang="zh-CN" b="0" dirty="0"/>
-              <a:t>(</a:t>
-            </a:r>
-            <a:r>
-              <a:rPr lang="en-US" altLang="zh-CN" b="0" dirty="0" err="1"/>
-              <a:t>SparseMatrix</a:t>
-            </a:r>
-            <a:r>
-              <a:rPr lang="en-US" altLang="zh-CN" b="0" dirty="0"/>
-              <a:t>* </a:t>
-            </a:r>
-            <a:r>
-              <a:rPr lang="en-US" altLang="zh-CN" b="0" dirty="0" err="1"/>
-              <a:t>pMatrix</a:t>
-            </a:r>
-            <a:r>
-              <a:rPr lang="en-US" altLang="zh-CN" b="0" dirty="0"/>
-              <a:t>,</a:t>
-            </a:r>
-          </a:p>
-          <a:p>
-            <a:pPr marL="0" indent="0">
-              <a:lnSpc>
-                <a:spcPct val="100000"/>
-              </a:lnSpc>
-              <a:buNone/>
-            </a:pPr>
-            <a:r>
-              <a:rPr lang="en-US" altLang="zh-CN" b="0" dirty="0"/>
-              <a:t>                                       int rows, int columns) {</a:t>
-            </a:r>
-          </a:p>
-          <a:p>
-            <a:pPr marL="0" indent="0">
-              <a:lnSpc>
-                <a:spcPct val="100000"/>
-              </a:lnSpc>
-              <a:buNone/>
-            </a:pPr>
-            <a:r>
-              <a:rPr lang="en-US" altLang="zh-CN" b="0" dirty="0"/>
-              <a:t>    </a:t>
-            </a:r>
-            <a:r>
-              <a:rPr lang="en-US" altLang="zh-CN" b="0" dirty="0" err="1"/>
-              <a:t>pMatrix</a:t>
-            </a:r>
-            <a:r>
-              <a:rPr lang="en-US" altLang="zh-CN" b="0" dirty="0"/>
-              <a:t>-&gt;</a:t>
-            </a:r>
-            <a:r>
-              <a:rPr lang="en-US" altLang="zh-CN" b="0" dirty="0" err="1"/>
-              <a:t>pRowHead</a:t>
-            </a:r>
-            <a:r>
-              <a:rPr lang="en-US" altLang="zh-CN" b="0" dirty="0"/>
-              <a:t>=(</a:t>
-            </a:r>
-            <a:r>
-              <a:rPr lang="en-US" altLang="zh-CN" b="0" dirty="0" err="1"/>
-              <a:t>CrossNode</a:t>
-            </a:r>
-            <a:r>
-              <a:rPr lang="en-US" altLang="zh-CN" b="0" dirty="0"/>
-              <a:t>**)malloc(rows*</a:t>
-            </a:r>
-          </a:p>
-          <a:p>
-            <a:pPr marL="0" indent="0">
-              <a:lnSpc>
-                <a:spcPct val="100000"/>
-              </a:lnSpc>
-              <a:buNone/>
-            </a:pPr>
-            <a:r>
-              <a:rPr lang="en-US" altLang="zh-CN" b="0" dirty="0"/>
-              <a:t>                                         </a:t>
-            </a:r>
-            <a:r>
-              <a:rPr lang="en-US" altLang="zh-CN" b="0" dirty="0" err="1"/>
-              <a:t>sizeof</a:t>
-            </a:r>
-            <a:r>
-              <a:rPr lang="en-US" altLang="zh-CN" b="0" dirty="0"/>
-              <a:t>(</a:t>
-            </a:r>
-            <a:r>
-              <a:rPr lang="en-US" altLang="zh-CN" b="0" dirty="0" err="1"/>
-              <a:t>CrossNode</a:t>
-            </a:r>
-            <a:r>
-              <a:rPr lang="en-US" altLang="zh-CN" b="0" dirty="0"/>
-              <a:t>*));</a:t>
-            </a:r>
-          </a:p>
-          <a:p>
-            <a:pPr marL="0" indent="0">
-              <a:lnSpc>
-                <a:spcPct val="100000"/>
-              </a:lnSpc>
-              <a:buNone/>
-            </a:pPr>
-            <a:r>
-              <a:rPr lang="en-US" altLang="zh-CN" b="0" dirty="0"/>
-              <a:t>    if (</a:t>
-            </a:r>
-            <a:r>
-              <a:rPr lang="en-US" altLang="zh-CN" b="0" dirty="0" err="1"/>
-              <a:t>pMatrix</a:t>
-            </a:r>
-            <a:r>
-              <a:rPr lang="en-US" altLang="zh-CN" b="0" dirty="0"/>
-              <a:t>-&gt;</a:t>
-            </a:r>
-            <a:r>
-              <a:rPr lang="en-US" altLang="zh-CN" b="0" dirty="0" err="1"/>
-              <a:t>pRowHead</a:t>
-            </a:r>
-            <a:r>
-              <a:rPr lang="en-US" altLang="zh-CN" b="0" dirty="0"/>
-              <a:t>==NULL){</a:t>
-            </a:r>
-          </a:p>
-          <a:p>
-            <a:pPr marL="0" indent="0">
-              <a:lnSpc>
-                <a:spcPct val="100000"/>
-              </a:lnSpc>
-              <a:buNone/>
-            </a:pPr>
-            <a:r>
-              <a:rPr lang="en-US" altLang="zh-CN" b="0" dirty="0"/>
-              <a:t>        return ERROR;</a:t>
-            </a:r>
-          </a:p>
-          <a:p>
-            <a:pPr marL="0" indent="0">
-              <a:lnSpc>
-                <a:spcPct val="100000"/>
-              </a:lnSpc>
-              <a:buNone/>
-            </a:pPr>
-            <a:r>
-              <a:rPr lang="en-US" altLang="zh-CN" b="0" dirty="0"/>
-              <a:t>    }</a:t>
-            </a:r>
-          </a:p>
-          <a:p>
-            <a:pPr marL="0" indent="0">
-              <a:lnSpc>
-                <a:spcPct val="100000"/>
-              </a:lnSpc>
-              <a:buNone/>
-            </a:pPr>
-            <a:r>
-              <a:rPr lang="en-US" altLang="zh-CN" b="0" dirty="0"/>
-              <a:t>    </a:t>
-            </a:r>
-            <a:r>
-              <a:rPr lang="en-US" altLang="zh-CN" b="0" dirty="0" err="1"/>
-              <a:t>pMatrix</a:t>
-            </a:r>
-            <a:r>
-              <a:rPr lang="en-US" altLang="zh-CN" b="0" dirty="0"/>
-              <a:t>-&gt;</a:t>
-            </a:r>
-            <a:r>
-              <a:rPr lang="en-US" altLang="zh-CN" b="0" dirty="0" err="1"/>
-              <a:t>pColumnHead</a:t>
-            </a:r>
-            <a:r>
-              <a:rPr lang="en-US" altLang="zh-CN" b="0" dirty="0"/>
-              <a:t>=(</a:t>
-            </a:r>
-            <a:r>
-              <a:rPr lang="en-US" altLang="zh-CN" b="0" dirty="0" err="1"/>
-              <a:t>CrossNode</a:t>
-            </a:r>
-            <a:r>
-              <a:rPr lang="en-US" altLang="zh-CN" b="0" dirty="0"/>
-              <a:t>**)malloc(columns*</a:t>
-            </a:r>
-          </a:p>
-          <a:p>
-            <a:pPr marL="0" indent="0">
-              <a:lnSpc>
-                <a:spcPct val="100000"/>
-              </a:lnSpc>
-              <a:buNone/>
-            </a:pPr>
-            <a:r>
-              <a:rPr lang="en-US" altLang="zh-CN" b="0" dirty="0"/>
-              <a:t>                                               </a:t>
-            </a:r>
-            <a:r>
-              <a:rPr lang="en-US" altLang="zh-CN" b="0" dirty="0" err="1"/>
-              <a:t>sizeof</a:t>
-            </a:r>
-            <a:r>
-              <a:rPr lang="en-US" altLang="zh-CN" b="0" dirty="0"/>
-              <a:t>(</a:t>
-            </a:r>
-            <a:r>
-              <a:rPr lang="en-US" altLang="zh-CN" b="0" dirty="0" err="1"/>
-              <a:t>CrossNode</a:t>
-            </a:r>
-            <a:r>
-              <a:rPr lang="en-US" altLang="zh-CN" b="0" dirty="0"/>
-              <a:t>*));</a:t>
-            </a:r>
-          </a:p>
-          <a:p>
-            <a:pPr marL="0" indent="0">
-              <a:lnSpc>
-                <a:spcPct val="100000"/>
-              </a:lnSpc>
-              <a:buNone/>
-            </a:pPr>
-            <a:r>
-              <a:rPr lang="en-US" altLang="zh-CN" b="0" dirty="0"/>
-              <a:t>    if (</a:t>
-            </a:r>
-            <a:r>
-              <a:rPr lang="en-US" altLang="zh-CN" b="0" dirty="0" err="1"/>
-              <a:t>pMatrix</a:t>
-            </a:r>
-            <a:r>
-              <a:rPr lang="en-US" altLang="zh-CN" b="0" dirty="0"/>
-              <a:t>-&gt;</a:t>
-            </a:r>
-            <a:r>
-              <a:rPr lang="en-US" altLang="zh-CN" b="0" dirty="0" err="1"/>
-              <a:t>pColumnHead</a:t>
-            </a:r>
-            <a:r>
-              <a:rPr lang="en-US" altLang="zh-CN" b="0" dirty="0"/>
-              <a:t>==NULL) {</a:t>
-            </a:r>
-          </a:p>
-          <a:p>
-            <a:pPr marL="0" indent="0">
-              <a:lnSpc>
-                <a:spcPct val="100000"/>
-              </a:lnSpc>
-              <a:buNone/>
-            </a:pPr>
-            <a:endParaRPr lang="zh-CN" altLang="en-US" b="0" dirty="0"/>
-          </a:p>
-        </p:txBody>
-      </p:sp>
-    </p:spTree>
-    <p:extLst>
-      <p:ext uri="{BB962C8B-B14F-4D97-AF65-F5344CB8AC3E}">
-        <p14:creationId xmlns:p14="http://schemas.microsoft.com/office/powerpoint/2010/main" val="2887470890"/>
-      </p:ext>
-    </p:extLst>
-  </p:cSld>
-  <p:clrMapOvr>
-    <a:masterClrMapping/>
-  </p:clrMapOvr>
-</p:sld>
-</file>
-
-<file path=ppt/slides/slide23.xml><?xml version="1.0" encoding="utf-8"?>
-<p:sld xmlns:a="http://schemas.openxmlformats.org/drawingml/2006/main" xmlns:r="http://schemas.openxmlformats.org/officeDocument/2006/relationships" xmlns:p="http://schemas.openxmlformats.org/presentationml/2006/main">
-  <p:cSld>
-    <p:spTree>
-      <p:nvGrpSpPr>
-        <p:cNvPr id="1" name=""/>
-        <p:cNvGrpSpPr/>
-        <p:nvPr/>
-      </p:nvGrpSpPr>
-      <p:grpSpPr>
-        <a:xfrm>
-          <a:off x="0" y="0"/>
-          <a:ext cx="0" cy="0"/>
-          <a:chOff x="0" y="0"/>
-          <a:chExt cx="0" cy="0"/>
-        </a:xfrm>
-      </p:grpSpPr>
-      <p:sp>
-        <p:nvSpPr>
-          <p:cNvPr id="2" name="标题 1">
-            <a:extLst>
-              <a:ext uri="{FF2B5EF4-FFF2-40B4-BE49-F238E27FC236}">
-                <a16:creationId xmlns:a16="http://schemas.microsoft.com/office/drawing/2014/main" id="{5754B905-4CE6-42EA-8914-8E5A0EF91906}"/>
-              </a:ext>
-            </a:extLst>
-          </p:cNvPr>
-          <p:cNvSpPr>
-            <a:spLocks noGrp="1"/>
-          </p:cNvSpPr>
-          <p:nvPr>
-            <p:ph type="title"/>
-          </p:nvPr>
-        </p:nvSpPr>
-        <p:spPr/>
-        <p:txBody>
-          <a:bodyPr/>
-          <a:lstStyle/>
-          <a:p>
-            <a:r>
-              <a:rPr lang="zh-CN" altLang="en-US" dirty="0"/>
-              <a:t>初始化疏矩阵</a:t>
-            </a:r>
-            <a:r>
-              <a:rPr lang="en-US" altLang="zh-CN" dirty="0"/>
-              <a:t>(</a:t>
-            </a:r>
-            <a:r>
-              <a:rPr lang="zh-CN" altLang="en-US" dirty="0"/>
-              <a:t>接上</a:t>
-            </a:r>
-            <a:r>
-              <a:rPr lang="en-US" altLang="zh-CN" dirty="0"/>
-              <a:t>)</a:t>
-            </a:r>
-            <a:endParaRPr lang="zh-CN" altLang="en-US" dirty="0"/>
-          </a:p>
-        </p:txBody>
-      </p:sp>
-      <p:sp>
-        <p:nvSpPr>
-          <p:cNvPr id="3" name="内容占位符 2">
-            <a:extLst>
-              <a:ext uri="{FF2B5EF4-FFF2-40B4-BE49-F238E27FC236}">
-                <a16:creationId xmlns:a16="http://schemas.microsoft.com/office/drawing/2014/main" id="{C56E41B7-A5A4-4A45-BF4D-9DFF6A45DD9D}"/>
-              </a:ext>
-            </a:extLst>
-          </p:cNvPr>
-          <p:cNvSpPr>
-            <a:spLocks noGrp="1"/>
-          </p:cNvSpPr>
-          <p:nvPr>
-            <p:ph idx="1"/>
-          </p:nvPr>
-        </p:nvSpPr>
-        <p:spPr>
-          <a:xfrm>
-            <a:off x="304800" y="1371600"/>
-            <a:ext cx="11887200" cy="5181600"/>
-          </a:xfrm>
-        </p:spPr>
-        <p:txBody>
-          <a:bodyPr/>
-          <a:lstStyle/>
-          <a:p>
-            <a:pPr marL="0" indent="0">
-              <a:lnSpc>
-                <a:spcPct val="100000"/>
-              </a:lnSpc>
-              <a:buNone/>
-            </a:pPr>
-            <a:r>
-              <a:rPr lang="en-US" altLang="zh-CN" b="0" dirty="0"/>
-              <a:t>        return ERROR;</a:t>
-            </a:r>
-          </a:p>
-          <a:p>
-            <a:pPr marL="0" indent="0">
-              <a:lnSpc>
-                <a:spcPct val="100000"/>
-              </a:lnSpc>
-              <a:buNone/>
-            </a:pPr>
-            <a:r>
-              <a:rPr lang="en-US" altLang="zh-CN" b="0" dirty="0"/>
-              <a:t>    }</a:t>
-            </a:r>
-          </a:p>
-          <a:p>
-            <a:pPr marL="0" indent="0">
-              <a:lnSpc>
-                <a:spcPct val="100000"/>
-              </a:lnSpc>
-              <a:buNone/>
-            </a:pPr>
-            <a:r>
-              <a:rPr lang="en-US" altLang="zh-CN" b="0" dirty="0"/>
-              <a:t>    </a:t>
-            </a:r>
-            <a:r>
-              <a:rPr lang="en-US" altLang="zh-CN" b="0" dirty="0" err="1"/>
-              <a:t>pMatrix</a:t>
-            </a:r>
-            <a:r>
-              <a:rPr lang="en-US" altLang="zh-CN" b="0" dirty="0"/>
-              <a:t>-&gt;</a:t>
-            </a:r>
-            <a:r>
-              <a:rPr lang="en-US" altLang="zh-CN" b="0" dirty="0" err="1"/>
-              <a:t>numOfRows</a:t>
-            </a:r>
-            <a:r>
-              <a:rPr lang="en-US" altLang="zh-CN" b="0" dirty="0"/>
-              <a:t>=rows;</a:t>
-            </a:r>
-          </a:p>
-          <a:p>
-            <a:pPr marL="0" indent="0">
-              <a:lnSpc>
-                <a:spcPct val="100000"/>
-              </a:lnSpc>
-              <a:buNone/>
-            </a:pPr>
-            <a:r>
-              <a:rPr lang="en-US" altLang="zh-CN" b="0" dirty="0"/>
-              <a:t>    </a:t>
-            </a:r>
-            <a:r>
-              <a:rPr lang="en-US" altLang="zh-CN" b="0" dirty="0" err="1"/>
-              <a:t>pMatrix</a:t>
-            </a:r>
-            <a:r>
-              <a:rPr lang="en-US" altLang="zh-CN" b="0" dirty="0"/>
-              <a:t>-&gt;</a:t>
-            </a:r>
-            <a:r>
-              <a:rPr lang="en-US" altLang="zh-CN" b="0" dirty="0" err="1"/>
-              <a:t>numOfColumns</a:t>
-            </a:r>
-            <a:r>
-              <a:rPr lang="en-US" altLang="zh-CN" b="0" dirty="0"/>
-              <a:t>=columns;</a:t>
-            </a:r>
-          </a:p>
-          <a:p>
-            <a:pPr marL="0" indent="0">
-              <a:lnSpc>
-                <a:spcPct val="100000"/>
-              </a:lnSpc>
-              <a:buNone/>
-            </a:pPr>
-            <a:r>
-              <a:rPr lang="en-US" altLang="zh-CN" b="0" dirty="0"/>
-              <a:t>    </a:t>
-            </a:r>
-            <a:r>
-              <a:rPr lang="en-US" altLang="zh-CN" b="0" dirty="0" err="1"/>
-              <a:t>pMatrix</a:t>
-            </a:r>
-            <a:r>
-              <a:rPr lang="en-US" altLang="zh-CN" b="0" dirty="0"/>
-              <a:t>-&gt;</a:t>
-            </a:r>
-            <a:r>
-              <a:rPr lang="en-US" altLang="zh-CN" b="0" dirty="0" err="1"/>
-              <a:t>numOfNonzeros</a:t>
-            </a:r>
-            <a:r>
-              <a:rPr lang="en-US" altLang="zh-CN" b="0" dirty="0"/>
-              <a:t>=0;</a:t>
-            </a:r>
-          </a:p>
-          <a:p>
-            <a:pPr marL="0" indent="0">
-              <a:lnSpc>
-                <a:spcPct val="100000"/>
-              </a:lnSpc>
-              <a:buNone/>
-            </a:pPr>
-            <a:r>
-              <a:rPr lang="en-US" altLang="zh-CN" b="0" dirty="0"/>
-              <a:t>    return OK;</a:t>
-            </a:r>
-          </a:p>
-          <a:p>
-            <a:pPr marL="0" indent="0">
-              <a:lnSpc>
-                <a:spcPct val="100000"/>
-              </a:lnSpc>
-              <a:buNone/>
-            </a:pPr>
-            <a:r>
-              <a:rPr lang="en-US" altLang="zh-CN" b="0" dirty="0"/>
-              <a:t>}</a:t>
-            </a:r>
-          </a:p>
-          <a:p>
-            <a:pPr marL="0" indent="0">
-              <a:lnSpc>
-                <a:spcPct val="100000"/>
-              </a:lnSpc>
-              <a:buNone/>
-            </a:pPr>
-            <a:r>
-              <a:rPr lang="en-US" altLang="zh-CN" b="0" dirty="0"/>
-              <a:t>    </a:t>
-            </a:r>
-            <a:endParaRPr lang="zh-CN" altLang="en-US" b="0" dirty="0"/>
-          </a:p>
-        </p:txBody>
-      </p:sp>
-    </p:spTree>
-    <p:extLst>
-      <p:ext uri="{BB962C8B-B14F-4D97-AF65-F5344CB8AC3E}">
-        <p14:creationId xmlns:p14="http://schemas.microsoft.com/office/powerpoint/2010/main" val="942110685"/>
-      </p:ext>
-    </p:extLst>
-  </p:cSld>
-  <p:clrMapOvr>
-    <a:masterClrMapping/>
-  </p:clrMapOvr>
-</p:sld>
-</file>
-
-<file path=ppt/slides/slide24.xml><?xml version="1.0" encoding="utf-8"?>
-<p:sld xmlns:a="http://schemas.openxmlformats.org/drawingml/2006/main" xmlns:r="http://schemas.openxmlformats.org/officeDocument/2006/relationships" xmlns:p="http://schemas.openxmlformats.org/presentationml/2006/main">
-  <p:cSld>
-    <p:spTree>
-      <p:nvGrpSpPr>
-        <p:cNvPr id="1" name=""/>
-        <p:cNvGrpSpPr/>
-        <p:nvPr/>
-      </p:nvGrpSpPr>
-      <p:grpSpPr>
-        <a:xfrm>
-          <a:off x="0" y="0"/>
-          <a:ext cx="0" cy="0"/>
-          <a:chOff x="0" y="0"/>
-          <a:chExt cx="0" cy="0"/>
-        </a:xfrm>
-      </p:grpSpPr>
-      <p:sp>
-        <p:nvSpPr>
-          <p:cNvPr id="2" name="标题 1">
-            <a:extLst>
-              <a:ext uri="{FF2B5EF4-FFF2-40B4-BE49-F238E27FC236}">
                 <a16:creationId xmlns:a16="http://schemas.microsoft.com/office/drawing/2014/main" id="{60727F56-F7C8-47A2-82AD-1F5E1240A2B1}"/>
               </a:ext>
             </a:extLst>
@@ -18442,7 +17054,7 @@
 </p:sld>
 </file>
 
-<file path=ppt/slides/slide25.xml><?xml version="1.0" encoding="utf-8"?>
+<file path=ppt/slides/slide21.xml><?xml version="1.0" encoding="utf-8"?>
 <p:sld xmlns:a="http://schemas.openxmlformats.org/drawingml/2006/main" xmlns:r="http://schemas.openxmlformats.org/officeDocument/2006/relationships" xmlns:p="http://schemas.openxmlformats.org/presentationml/2006/main">
   <p:cSld>
     <p:spTree>
@@ -18535,7 +17147,7 @@
 </p:sld>
 </file>
 
-<file path=ppt/slides/slide26.xml><?xml version="1.0" encoding="utf-8"?>
+<file path=ppt/slides/slide22.xml><?xml version="1.0" encoding="utf-8"?>
 <p:sld xmlns:a="http://schemas.openxmlformats.org/drawingml/2006/main" xmlns:r="http://schemas.openxmlformats.org/officeDocument/2006/relationships" xmlns:p="http://schemas.openxmlformats.org/presentationml/2006/main">
   <p:cSld>
     <p:spTree>
@@ -18805,7 +17417,7 @@
 </p:sld>
 </file>
 
-<file path=ppt/slides/slide27.xml><?xml version="1.0" encoding="utf-8"?>
+<file path=ppt/slides/slide23.xml><?xml version="1.0" encoding="utf-8"?>
 <p:sld xmlns:a="http://schemas.openxmlformats.org/drawingml/2006/main" xmlns:r="http://schemas.openxmlformats.org/officeDocument/2006/relationships" xmlns:p="http://schemas.openxmlformats.org/presentationml/2006/main">
   <p:cSld>
     <p:spTree>
@@ -18827,7 +17439,7 @@
           <p:cNvPr id="2" name="标题 1">
             <a:extLst>
               <a:ext uri="{FF2B5EF4-FFF2-40B4-BE49-F238E27FC236}">
-                <a16:creationId xmlns:a16="http://schemas.microsoft.com/office/drawing/2014/main" id="{4CFADA15-701E-4EE6-A4FA-11F8C4BA5291}"/>
+                <a16:creationId xmlns:a16="http://schemas.microsoft.com/office/drawing/2014/main" id="{4D4A6DE4-6C0F-D460-59BD-3E04A69F45D0}"/>
               </a:ext>
             </a:extLst>
           </p:cNvPr>
@@ -18844,251 +17456,47 @@
           <a:lstStyle/>
           <a:p>
             <a:r>
-              <a:rPr lang="zh-CN" altLang="en-US" dirty="0"/>
-              <a:t>广义表的一种代码描述</a:t>
-            </a:r>
+              <a:rPr lang="en-US" altLang="zh-CN" dirty="0"/>
+              <a:t>Assignments</a:t>
+            </a:r>
+            <a:endParaRPr lang="zh-CN" altLang="en-US" dirty="0"/>
           </a:p>
         </p:txBody>
       </p:sp>
-      <p:sp>
-        <p:nvSpPr>
-          <p:cNvPr id="3" name="内容占位符 2">
+      <p:pic>
+        <p:nvPicPr>
+          <p:cNvPr id="5" name="图片 4">
             <a:extLst>
               <a:ext uri="{FF2B5EF4-FFF2-40B4-BE49-F238E27FC236}">
-                <a16:creationId xmlns:a16="http://schemas.microsoft.com/office/drawing/2014/main" id="{497314AB-9AF0-4820-AD40-0D4E26BD7370}"/>
+                <a16:creationId xmlns:a16="http://schemas.microsoft.com/office/drawing/2014/main" id="{DE6EA723-5880-2B96-F076-85E7FF8ECB61}"/>
               </a:ext>
             </a:extLst>
           </p:cNvPr>
-          <p:cNvSpPr>
-            <a:spLocks noGrp="1"/>
-          </p:cNvSpPr>
-          <p:nvPr>
-            <p:ph idx="1"/>
-          </p:nvPr>
-        </p:nvSpPr>
-        <p:spPr/>
-        <p:txBody>
-          <a:bodyPr/>
-          <a:lstStyle/>
-          <a:p>
-            <a:pPr marL="0" indent="0">
-              <a:lnSpc>
-                <a:spcPct val="120000"/>
-              </a:lnSpc>
-              <a:buNone/>
-            </a:pPr>
-            <a:r>
-              <a:rPr lang="en-US" altLang="zh-CN" b="0" dirty="0"/>
-              <a:t>typedef </a:t>
-            </a:r>
-            <a:r>
-              <a:rPr lang="en-US" altLang="zh-CN" b="0" dirty="0" err="1"/>
-              <a:t>enum</a:t>
-            </a:r>
-            <a:r>
-              <a:rPr lang="en-US" altLang="zh-CN" b="0" dirty="0"/>
-              <a:t> {ATOM=0, LIST=1} </a:t>
-            </a:r>
-            <a:r>
-              <a:rPr lang="en-US" altLang="zh-CN" b="0" dirty="0" err="1"/>
-              <a:t>ElemTag</a:t>
-            </a:r>
-            <a:r>
-              <a:rPr lang="en-US" altLang="zh-CN" b="0" dirty="0"/>
-              <a:t>;</a:t>
-            </a:r>
-          </a:p>
-          <a:p>
-            <a:pPr marL="0" indent="0">
-              <a:lnSpc>
-                <a:spcPct val="120000"/>
-              </a:lnSpc>
-              <a:buNone/>
-            </a:pPr>
-            <a:r>
-              <a:rPr lang="en-US" altLang="zh-CN" b="0" dirty="0"/>
-              <a:t>typedef struct </a:t>
-            </a:r>
-            <a:r>
-              <a:rPr lang="en-US" altLang="zh-CN" b="0" dirty="0" err="1"/>
-              <a:t>GeneralNode</a:t>
-            </a:r>
-            <a:r>
-              <a:rPr lang="en-US" altLang="zh-CN" b="0" dirty="0"/>
-              <a:t> {</a:t>
-            </a:r>
-          </a:p>
-          <a:p>
-            <a:pPr marL="0" indent="0">
-              <a:lnSpc>
-                <a:spcPct val="120000"/>
-              </a:lnSpc>
-              <a:buNone/>
-            </a:pPr>
-            <a:r>
-              <a:rPr lang="en-US" altLang="zh-CN" b="0" dirty="0"/>
-              <a:t>    </a:t>
-            </a:r>
-            <a:r>
-              <a:rPr lang="en-US" altLang="zh-CN" b="0" dirty="0" err="1"/>
-              <a:t>ElemTag</a:t>
-            </a:r>
-            <a:r>
-              <a:rPr lang="en-US" altLang="zh-CN" b="0" dirty="0"/>
-              <a:t> tag;</a:t>
-            </a:r>
-          </a:p>
-          <a:p>
-            <a:pPr marL="0" indent="0">
-              <a:lnSpc>
-                <a:spcPct val="120000"/>
-              </a:lnSpc>
-              <a:buNone/>
-            </a:pPr>
-            <a:r>
-              <a:rPr lang="en-US" altLang="zh-CN" b="0" dirty="0"/>
-              <a:t>    union { </a:t>
-            </a:r>
-          </a:p>
-          <a:p>
-            <a:pPr marL="0" indent="0">
-              <a:lnSpc>
-                <a:spcPct val="120000"/>
-              </a:lnSpc>
-              <a:buNone/>
-            </a:pPr>
-            <a:r>
-              <a:rPr lang="en-US" altLang="zh-CN" b="0" dirty="0"/>
-              <a:t>        </a:t>
-            </a:r>
-            <a:r>
-              <a:rPr lang="en-US" altLang="zh-CN" b="0" dirty="0" err="1"/>
-              <a:t>GenericPointer</a:t>
-            </a:r>
-            <a:r>
-              <a:rPr lang="en-US" altLang="zh-CN" b="0" dirty="0"/>
-              <a:t> </a:t>
-            </a:r>
-            <a:r>
-              <a:rPr lang="en-US" altLang="zh-CN" b="0" dirty="0" err="1"/>
-              <a:t>pData</a:t>
-            </a:r>
-            <a:r>
-              <a:rPr lang="en-US" altLang="zh-CN" b="0" dirty="0"/>
-              <a:t>;</a:t>
-            </a:r>
-          </a:p>
-          <a:p>
-            <a:pPr marL="0" indent="0">
-              <a:lnSpc>
-                <a:spcPct val="120000"/>
-              </a:lnSpc>
-              <a:buNone/>
-            </a:pPr>
-            <a:r>
-              <a:rPr lang="en-US" altLang="zh-CN" b="0" dirty="0"/>
-              <a:t>        struct </a:t>
-            </a:r>
-            <a:r>
-              <a:rPr lang="en-US" altLang="zh-CN" b="0" dirty="0" err="1"/>
-              <a:t>GeneralNode</a:t>
-            </a:r>
-            <a:r>
-              <a:rPr lang="en-US" altLang="zh-CN" b="0" dirty="0"/>
-              <a:t> *</a:t>
-            </a:r>
-            <a:r>
-              <a:rPr lang="en-US" altLang="zh-CN" b="0" dirty="0" err="1"/>
-              <a:t>pSubList</a:t>
-            </a:r>
-            <a:r>
-              <a:rPr lang="en-US" altLang="zh-CN" b="0" dirty="0"/>
-              <a:t>;</a:t>
-            </a:r>
-          </a:p>
-          <a:p>
-            <a:pPr marL="0" indent="0">
-              <a:lnSpc>
-                <a:spcPct val="120000"/>
-              </a:lnSpc>
-              <a:buNone/>
-            </a:pPr>
-            <a:r>
-              <a:rPr lang="en-US" altLang="zh-CN" b="0" dirty="0"/>
-              <a:t>    } </a:t>
-            </a:r>
-            <a:r>
-              <a:rPr lang="en-US" altLang="zh-CN" b="0" dirty="0" err="1"/>
-              <a:t>elem</a:t>
-            </a:r>
-            <a:r>
-              <a:rPr lang="en-US" altLang="zh-CN" b="0" dirty="0"/>
-              <a:t>;</a:t>
-            </a:r>
-          </a:p>
-          <a:p>
-            <a:pPr marL="0" indent="0">
-              <a:lnSpc>
-                <a:spcPct val="120000"/>
-              </a:lnSpc>
-              <a:buNone/>
-            </a:pPr>
-            <a:r>
-              <a:rPr lang="en-US" altLang="zh-CN" b="0" dirty="0"/>
-              <a:t>    struct </a:t>
-            </a:r>
-            <a:r>
-              <a:rPr lang="en-US" altLang="zh-CN" b="0" dirty="0" err="1"/>
-              <a:t>GeneralNode</a:t>
-            </a:r>
-            <a:r>
-              <a:rPr lang="en-US" altLang="zh-CN" b="0" dirty="0"/>
-              <a:t> *</a:t>
-            </a:r>
-            <a:r>
-              <a:rPr lang="en-US" altLang="zh-CN" b="0" dirty="0" err="1"/>
-              <a:t>pNext</a:t>
-            </a:r>
-            <a:r>
-              <a:rPr lang="en-US" altLang="zh-CN" b="0" dirty="0"/>
-              <a:t>;</a:t>
-            </a:r>
-          </a:p>
-          <a:p>
-            <a:pPr marL="0" indent="0">
-              <a:lnSpc>
-                <a:spcPct val="120000"/>
-              </a:lnSpc>
-              <a:buNone/>
-            </a:pPr>
-            <a:r>
-              <a:rPr lang="en-US" altLang="zh-CN" b="0" dirty="0"/>
-              <a:t>} </a:t>
-            </a:r>
-            <a:r>
-              <a:rPr lang="en-US" altLang="zh-CN" b="0" dirty="0" err="1"/>
-              <a:t>GeneralNode</a:t>
-            </a:r>
-            <a:r>
-              <a:rPr lang="en-US" altLang="zh-CN" b="0" dirty="0"/>
-              <a:t>, *</a:t>
-            </a:r>
-            <a:r>
-              <a:rPr lang="en-US" altLang="zh-CN" b="0" dirty="0" err="1"/>
-              <a:t>GeneralList</a:t>
-            </a:r>
-            <a:r>
-              <a:rPr lang="en-US" altLang="zh-CN" b="0" dirty="0"/>
-              <a:t>;</a:t>
-            </a:r>
-            <a:endParaRPr lang="zh-CN" altLang="en-US" b="0" dirty="0"/>
-          </a:p>
-        </p:txBody>
-      </p:sp>
+          <p:cNvPicPr>
+            <a:picLocks noChangeAspect="1"/>
+          </p:cNvPicPr>
+          <p:nvPr/>
+        </p:nvPicPr>
+        <p:blipFill>
+          <a:blip r:embed="rId2"/>
+          <a:stretch>
+            <a:fillRect/>
+          </a:stretch>
+        </p:blipFill>
+        <p:spPr>
+          <a:xfrm>
+            <a:off x="409575" y="1309687"/>
+            <a:ext cx="11372850" cy="4238625"/>
+          </a:xfrm>
+          <a:prstGeom prst="rect">
+            <a:avLst/>
+          </a:prstGeom>
+        </p:spPr>
+      </p:pic>
     </p:spTree>
     <p:extLst>
       <p:ext uri="{BB962C8B-B14F-4D97-AF65-F5344CB8AC3E}">
-        <p14:creationId xmlns:p14="http://schemas.microsoft.com/office/powerpoint/2010/main" val="3300707690"/>
+        <p14:creationId xmlns:p14="http://schemas.microsoft.com/office/powerpoint/2010/main" val="694752288"/>
       </p:ext>
     </p:extLst>
   </p:cSld>
@@ -19098,7 +17506,7 @@
 </p:sld>
 </file>
 
-<file path=ppt/slides/slide28.xml><?xml version="1.0" encoding="utf-8"?>
+<file path=ppt/slides/slide24.xml><?xml version="1.0" encoding="utf-8"?>
 <p:sld xmlns:a="http://schemas.openxmlformats.org/drawingml/2006/main" xmlns:r="http://schemas.openxmlformats.org/officeDocument/2006/relationships" xmlns:p="http://schemas.openxmlformats.org/presentationml/2006/main">
   <p:cSld>
     <p:spTree>
